--- a/Documentation/Reports and Papers/Dissertation/Figures/70-overall/components/bpa_construction.pptx
+++ b/Documentation/Reports and Papers/Dissertation/Figures/70-overall/components/bpa_construction.pptx
@@ -7,7 +7,7 @@
   <p:sldIdLst>
     <p:sldId id="256" r:id="rId7"/>
   </p:sldIdLst>
-  <p:sldSz cx="5940000" cy="3816000" type="screen4x3"/>
+  <p:sldSz cx="5943600" cy="2984500" type="screen4x3"/>
   <p:notesSz cx="6858000" cy="9144000"/>
   <p:defaultTextStyle>
     <a:defPPr>
@@ -3096,8 +3096,8 @@
         </p:nvSpPr>
         <p:spPr>
           <a:xfrm>
-            <a:off x="72000" y="54000"/>
-            <a:ext cx="3600000" cy="270000"/>
+            <a:off x="152400" y="63500"/>
+            <a:ext cx="5638800" cy="228600"/>
           </a:xfrm>
           <a:prstGeom prst="rect">
             <a:avLst/>
@@ -3105,46 +3105,54 @@
           <a:noFill/>
         </p:spPr>
         <p:txBody>
-          <a:bodyPr wrap="square" lIns="10800" rIns="10800" tIns="3600" bIns="3600">
-            <a:spAutoFit/>
+          <a:bodyPr wrap="none" lIns="0" rIns="0" tIns="0" bIns="0">
+            <a:noAutofit/>
           </a:bodyPr>
           <a:lstStyle/>
           <a:p>
-            <a:pPr algn="l"/>
-            <a:r>
-              <a:rPr sz="1000" b="1">
+            <a:pPr algn="l">
+              <a:lnSpc>
+                <a:spcPts val="1320"/>
+              </a:lnSpc>
+              <a:spcBef>
+                <a:spcPts val="0"/>
+              </a:spcBef>
+              <a:spcAft>
+                <a:spcPts val="0"/>
+              </a:spcAft>
+            </a:pPr>
+            <a:r>
+              <a:rPr sz="1200" b="1" i="0">
                 <a:solidFill>
-                  <a:srgbClr val="1F1F1F"/>
+                  <a:srgbClr val="243343"/>
                 </a:solidFill>
                 <a:latin typeface="Arial"/>
               </a:rPr>
-              <a:t>(A) Longitudinal section with loads and constraints</a:t>
-            </a:r>
-          </a:p>
-        </p:txBody>
-      </p:sp>
-      <p:sp>
-        <p:nvSpPr>
-          <p:cNvPr id="3" name="Rounded Rectangle 2"/>
+              <a:t>(A) Layered FEA model: loads and constraints</a:t>
+            </a:r>
+          </a:p>
+        </p:txBody>
+      </p:sp>
+      <p:sp>
+        <p:nvSpPr>
+          <p:cNvPr id="3" name="Rectangle 2"/>
           <p:cNvSpPr/>
           <p:nvPr/>
         </p:nvSpPr>
         <p:spPr>
           <a:xfrm>
-            <a:off x="1422000" y="867239"/>
-            <a:ext cx="2771999" cy="245520"/>
-          </a:xfrm>
-          <a:prstGeom prst="roundRect">
-            <a:avLst>
-              <a:gd name="adj" fmla="val 50000"/>
-            </a:avLst>
+            <a:off x="673100" y="571500"/>
+            <a:ext cx="241300" cy="1473200"/>
+          </a:xfrm>
+          <a:prstGeom prst="rect">
+            <a:avLst/>
           </a:prstGeom>
           <a:solidFill>
-            <a:srgbClr val="E3E3E3"/>
+            <a:srgbClr val="D9E1E7"/>
           </a:solidFill>
-          <a:ln w="9525">
+          <a:ln w="12700">
             <a:solidFill>
-              <a:srgbClr val="8A8A8A"/>
+              <a:srgbClr val="243343"/>
             </a:solidFill>
           </a:ln>
         </p:spPr>
@@ -3170,51 +3178,41 @@
           </a:p>
         </p:txBody>
       </p:sp>
-      <p:sp>
-        <p:nvSpPr>
-          <p:cNvPr id="4" name="Rounded Rectangle 3"/>
-          <p:cNvSpPr/>
+      <p:cxnSp>
+        <p:nvCxnSpPr>
+          <p:cNvPr id="4" name="Connector 3"/>
+          <p:cNvCxnSpPr/>
           <p:nvPr/>
-        </p:nvSpPr>
-        <p:spPr>
-          <a:xfrm>
-            <a:off x="1314000" y="648000"/>
-            <a:ext cx="2987999" cy="684000"/>
-          </a:xfrm>
-          <a:prstGeom prst="roundRect">
-            <a:avLst>
-              <a:gd name="adj" fmla="val 50000"/>
-            </a:avLst>
-          </a:prstGeom>
-          <a:noFill/>
-          <a:ln w="22225">
+        </p:nvCxnSpPr>
+        <p:spPr>
+          <a:xfrm flipV="1">
+            <a:off x="558800" y="584200"/>
+            <a:ext cx="114300" cy="88900"/>
+          </a:xfrm>
+          <a:prstGeom prst="line">
+            <a:avLst/>
+          </a:prstGeom>
+          <a:ln w="8890">
             <a:solidFill>
-              <a:srgbClr val="1F1F1F"/>
+              <a:srgbClr val="243343"/>
             </a:solidFill>
           </a:ln>
         </p:spPr>
         <p:style>
-          <a:lnRef idx="1">
+          <a:lnRef idx="2">
             <a:schemeClr val="accent1"/>
           </a:lnRef>
-          <a:fillRef idx="3">
+          <a:fillRef idx="0">
             <a:schemeClr val="accent1"/>
           </a:fillRef>
-          <a:effectRef idx="2">
+          <a:effectRef idx="1">
             <a:schemeClr val="accent1"/>
           </a:effectRef>
           <a:fontRef idx="minor">
-            <a:schemeClr val="lt1"/>
+            <a:schemeClr val="tx1"/>
           </a:fontRef>
         </p:style>
-        <p:txBody>
-          <a:bodyPr rtlCol="0" anchor="ctr"/>
-          <a:lstStyle/>
-          <a:p>
-            <a:pPr algn="ctr"/>
-          </a:p>
-        </p:txBody>
-      </p:sp>
+      </p:cxnSp>
       <p:cxnSp>
         <p:nvCxnSpPr>
           <p:cNvPr id="5" name="Connector 4"/>
@@ -3222,16 +3220,16 @@
           <p:nvPr/>
         </p:nvCxnSpPr>
         <p:spPr>
-          <a:xfrm>
-            <a:off x="1422000" y="699300"/>
-            <a:ext cx="237000" cy="581400"/>
+          <a:xfrm flipV="1">
+            <a:off x="558800" y="711200"/>
+            <a:ext cx="114300" cy="88900"/>
           </a:xfrm>
           <a:prstGeom prst="line">
             <a:avLst/>
           </a:prstGeom>
-          <a:ln w="12700">
+          <a:ln w="8890">
             <a:solidFill>
-              <a:srgbClr val="1F1F1F"/>
+              <a:srgbClr val="243343"/>
             </a:solidFill>
           </a:ln>
         </p:spPr>
@@ -3258,15 +3256,15 @@
         </p:nvCxnSpPr>
         <p:spPr>
           <a:xfrm flipV="1">
-            <a:off x="1422000" y="699300"/>
-            <a:ext cx="237000" cy="581400"/>
+            <a:off x="558800" y="838200"/>
+            <a:ext cx="114300" cy="88900"/>
           </a:xfrm>
           <a:prstGeom prst="line">
             <a:avLst/>
           </a:prstGeom>
-          <a:ln w="12700">
+          <a:ln w="8890">
             <a:solidFill>
-              <a:srgbClr val="1F1F1F"/>
+              <a:srgbClr val="243343"/>
             </a:solidFill>
           </a:ln>
         </p:spPr>
@@ -3292,16 +3290,16 @@
           <p:nvPr/>
         </p:nvCxnSpPr>
         <p:spPr>
-          <a:xfrm>
-            <a:off x="1659000" y="699300"/>
-            <a:ext cx="237000" cy="581400"/>
+          <a:xfrm flipV="1">
+            <a:off x="558800" y="965200"/>
+            <a:ext cx="114300" cy="88900"/>
           </a:xfrm>
           <a:prstGeom prst="line">
             <a:avLst/>
           </a:prstGeom>
-          <a:ln w="12700">
+          <a:ln w="8890">
             <a:solidFill>
-              <a:srgbClr val="1F1F1F"/>
+              <a:srgbClr val="243343"/>
             </a:solidFill>
           </a:ln>
         </p:spPr>
@@ -3328,15 +3326,15 @@
         </p:nvCxnSpPr>
         <p:spPr>
           <a:xfrm flipV="1">
-            <a:off x="1659000" y="699300"/>
-            <a:ext cx="237000" cy="581400"/>
+            <a:off x="558800" y="1092200"/>
+            <a:ext cx="114300" cy="88900"/>
           </a:xfrm>
           <a:prstGeom prst="line">
             <a:avLst/>
           </a:prstGeom>
-          <a:ln w="12700">
+          <a:ln w="8890">
             <a:solidFill>
-              <a:srgbClr val="1F1F1F"/>
+              <a:srgbClr val="243343"/>
             </a:solidFill>
           </a:ln>
         </p:spPr>
@@ -3362,16 +3360,16 @@
           <p:nvPr/>
         </p:nvCxnSpPr>
         <p:spPr>
-          <a:xfrm>
-            <a:off x="1896000" y="699300"/>
-            <a:ext cx="237000" cy="581400"/>
+          <a:xfrm flipV="1">
+            <a:off x="558800" y="1219200"/>
+            <a:ext cx="114300" cy="88900"/>
           </a:xfrm>
           <a:prstGeom prst="line">
             <a:avLst/>
           </a:prstGeom>
-          <a:ln w="12700">
+          <a:ln w="8890">
             <a:solidFill>
-              <a:srgbClr val="1F1F1F"/>
+              <a:srgbClr val="243343"/>
             </a:solidFill>
           </a:ln>
         </p:spPr>
@@ -3398,15 +3396,15 @@
         </p:nvCxnSpPr>
         <p:spPr>
           <a:xfrm flipV="1">
-            <a:off x="1896000" y="699300"/>
-            <a:ext cx="237000" cy="581400"/>
+            <a:off x="558800" y="1346200"/>
+            <a:ext cx="114300" cy="88900"/>
           </a:xfrm>
           <a:prstGeom prst="line">
             <a:avLst/>
           </a:prstGeom>
-          <a:ln w="12700">
+          <a:ln w="8890">
             <a:solidFill>
-              <a:srgbClr val="1F1F1F"/>
+              <a:srgbClr val="243343"/>
             </a:solidFill>
           </a:ln>
         </p:spPr>
@@ -3432,16 +3430,16 @@
           <p:nvPr/>
         </p:nvCxnSpPr>
         <p:spPr>
-          <a:xfrm>
-            <a:off x="2133000" y="699300"/>
-            <a:ext cx="237000" cy="581400"/>
+          <a:xfrm flipV="1">
+            <a:off x="558800" y="1473200"/>
+            <a:ext cx="114300" cy="88900"/>
           </a:xfrm>
           <a:prstGeom prst="line">
             <a:avLst/>
           </a:prstGeom>
-          <a:ln w="12700">
+          <a:ln w="8890">
             <a:solidFill>
-              <a:srgbClr val="1F1F1F"/>
+              <a:srgbClr val="243343"/>
             </a:solidFill>
           </a:ln>
         </p:spPr>
@@ -3468,15 +3466,15 @@
         </p:nvCxnSpPr>
         <p:spPr>
           <a:xfrm flipV="1">
-            <a:off x="2133000" y="699300"/>
-            <a:ext cx="237000" cy="581400"/>
+            <a:off x="558800" y="1600200"/>
+            <a:ext cx="114300" cy="88900"/>
           </a:xfrm>
           <a:prstGeom prst="line">
             <a:avLst/>
           </a:prstGeom>
-          <a:ln w="12700">
+          <a:ln w="8890">
             <a:solidFill>
-              <a:srgbClr val="1F1F1F"/>
+              <a:srgbClr val="243343"/>
             </a:solidFill>
           </a:ln>
         </p:spPr>
@@ -3502,16 +3500,16 @@
           <p:nvPr/>
         </p:nvCxnSpPr>
         <p:spPr>
-          <a:xfrm>
-            <a:off x="2370000" y="699300"/>
-            <a:ext cx="237000" cy="581400"/>
+          <a:xfrm flipV="1">
+            <a:off x="558800" y="1727200"/>
+            <a:ext cx="114300" cy="88900"/>
           </a:xfrm>
           <a:prstGeom prst="line">
             <a:avLst/>
           </a:prstGeom>
-          <a:ln w="12700">
+          <a:ln w="8890">
             <a:solidFill>
-              <a:srgbClr val="1F1F1F"/>
+              <a:srgbClr val="243343"/>
             </a:solidFill>
           </a:ln>
         </p:spPr>
@@ -3538,15 +3536,15 @@
         </p:nvCxnSpPr>
         <p:spPr>
           <a:xfrm flipV="1">
-            <a:off x="2370000" y="699300"/>
-            <a:ext cx="237000" cy="581400"/>
+            <a:off x="558800" y="1854200"/>
+            <a:ext cx="114300" cy="88900"/>
           </a:xfrm>
           <a:prstGeom prst="line">
             <a:avLst/>
           </a:prstGeom>
-          <a:ln w="12700">
+          <a:ln w="8890">
             <a:solidFill>
-              <a:srgbClr val="1F1F1F"/>
+              <a:srgbClr val="243343"/>
             </a:solidFill>
           </a:ln>
         </p:spPr>
@@ -3572,16 +3570,16 @@
           <p:nvPr/>
         </p:nvCxnSpPr>
         <p:spPr>
-          <a:xfrm>
-            <a:off x="2607000" y="699300"/>
-            <a:ext cx="237000" cy="581400"/>
+          <a:xfrm flipV="1">
+            <a:off x="558800" y="1981200"/>
+            <a:ext cx="114300" cy="88900"/>
           </a:xfrm>
           <a:prstGeom prst="line">
             <a:avLst/>
           </a:prstGeom>
-          <a:ln w="12700">
+          <a:ln w="8890">
             <a:solidFill>
-              <a:srgbClr val="1F1F1F"/>
+              <a:srgbClr val="243343"/>
             </a:solidFill>
           </a:ln>
         </p:spPr>
@@ -3600,23 +3598,180 @@
           </a:fontRef>
         </p:style>
       </p:cxnSp>
+      <p:sp>
+        <p:nvSpPr>
+          <p:cNvPr id="16" name="TextBox 15"/>
+          <p:cNvSpPr txBox="1"/>
+          <p:nvPr/>
+        </p:nvSpPr>
+        <p:spPr>
+          <a:xfrm>
+            <a:off x="76200" y="889000"/>
+            <a:ext cx="508000" cy="381000"/>
+          </a:xfrm>
+          <a:prstGeom prst="rect">
+            <a:avLst/>
+          </a:prstGeom>
+          <a:noFill/>
+        </p:spPr>
+        <p:txBody>
+          <a:bodyPr wrap="none" lIns="0" rIns="0" tIns="0" bIns="0">
+            <a:noAutofit/>
+          </a:bodyPr>
+          <a:lstStyle/>
+          <a:p>
+            <a:pPr algn="l">
+              <a:lnSpc>
+                <a:spcPts val="1210"/>
+              </a:lnSpc>
+              <a:spcBef>
+                <a:spcPts val="0"/>
+              </a:spcBef>
+              <a:spcAft>
+                <a:spcPts val="0"/>
+              </a:spcAft>
+            </a:pPr>
+            <a:r>
+              <a:rPr sz="1100" b="0" i="0">
+                <a:solidFill>
+                  <a:srgbClr val="243343"/>
+                </a:solidFill>
+                <a:latin typeface="Arial"/>
+              </a:rPr>
+              <a:t>Fixed</a:t>
+            </a:r>
+          </a:p>
+          <a:p>
+            <a:pPr algn="l">
+              <a:lnSpc>
+                <a:spcPts val="1210"/>
+              </a:lnSpc>
+              <a:spcBef>
+                <a:spcPts val="0"/>
+              </a:spcBef>
+              <a:spcAft>
+                <a:spcPts val="0"/>
+              </a:spcAft>
+            </a:pPr>
+            <a:r>
+              <a:rPr sz="1100" b="0" i="0">
+                <a:solidFill>
+                  <a:srgbClr val="243343"/>
+                </a:solidFill>
+                <a:latin typeface="Arial"/>
+              </a:rPr>
+              <a:t>end</a:t>
+            </a:r>
+          </a:p>
+        </p:txBody>
+      </p:sp>
+      <p:sp>
+        <p:nvSpPr>
+          <p:cNvPr id="17" name="Rectangle 16"/>
+          <p:cNvSpPr/>
+          <p:nvPr/>
+        </p:nvSpPr>
+        <p:spPr>
+          <a:xfrm>
+            <a:off x="914400" y="673100"/>
+            <a:ext cx="3060700" cy="190500"/>
+          </a:xfrm>
+          <a:prstGeom prst="rect">
+            <a:avLst/>
+          </a:prstGeom>
+          <a:solidFill>
+            <a:srgbClr val="D7DEE4"/>
+          </a:solidFill>
+          <a:ln w="6985">
+            <a:solidFill>
+              <a:srgbClr val="6C7680"/>
+            </a:solidFill>
+          </a:ln>
+        </p:spPr>
+        <p:style>
+          <a:lnRef idx="1">
+            <a:schemeClr val="accent1"/>
+          </a:lnRef>
+          <a:fillRef idx="3">
+            <a:schemeClr val="accent1"/>
+          </a:fillRef>
+          <a:effectRef idx="2">
+            <a:schemeClr val="accent1"/>
+          </a:effectRef>
+          <a:fontRef idx="minor">
+            <a:schemeClr val="lt1"/>
+          </a:fontRef>
+        </p:style>
+        <p:txBody>
+          <a:bodyPr rtlCol="0" anchor="ctr"/>
+          <a:lstStyle/>
+          <a:p>
+            <a:pPr algn="ctr"/>
+          </a:p>
+        </p:txBody>
+      </p:sp>
+      <p:sp>
+        <p:nvSpPr>
+          <p:cNvPr id="18" name="TextBox 17"/>
+          <p:cNvSpPr txBox="1"/>
+          <p:nvPr/>
+        </p:nvSpPr>
+        <p:spPr>
+          <a:xfrm>
+            <a:off x="4165600" y="685800"/>
+            <a:ext cx="1651000" cy="177800"/>
+          </a:xfrm>
+          <a:prstGeom prst="rect">
+            <a:avLst/>
+          </a:prstGeom>
+          <a:noFill/>
+        </p:spPr>
+        <p:txBody>
+          <a:bodyPr wrap="none" lIns="0" rIns="0" tIns="0" bIns="0">
+            <a:noAutofit/>
+          </a:bodyPr>
+          <a:lstStyle/>
+          <a:p>
+            <a:pPr algn="l">
+              <a:lnSpc>
+                <a:spcPts val="1188"/>
+              </a:lnSpc>
+              <a:spcBef>
+                <a:spcPts val="0"/>
+              </a:spcBef>
+              <a:spcAft>
+                <a:spcPts val="0"/>
+              </a:spcAft>
+            </a:pPr>
+            <a:r>
+              <a:rPr sz="1080" b="0" i="0">
+                <a:solidFill>
+                  <a:srgbClr val="243343"/>
+                </a:solidFill>
+                <a:latin typeface="Arial"/>
+              </a:rPr>
+              <a:t>Fabric outer</a:t>
+            </a:r>
+          </a:p>
+        </p:txBody>
+      </p:sp>
       <p:cxnSp>
         <p:nvCxnSpPr>
-          <p:cNvPr id="16" name="Connector 15"/>
+          <p:cNvPr id="19" name="Connector 18"/>
           <p:cNvCxnSpPr/>
           <p:nvPr/>
         </p:nvCxnSpPr>
         <p:spPr>
-          <a:xfrm flipV="1">
-            <a:off x="2607000" y="699300"/>
-            <a:ext cx="237000" cy="581400"/>
+          <a:xfrm>
+            <a:off x="3975100" y="768350"/>
+            <a:ext cx="127000" cy="0"/>
           </a:xfrm>
           <a:prstGeom prst="line">
             <a:avLst/>
           </a:prstGeom>
-          <a:ln w="12700">
+          <a:ln w="8890">
             <a:solidFill>
-              <a:srgbClr val="1F1F1F"/>
+              <a:srgbClr val="243343"/>
             </a:solidFill>
           </a:ln>
         </p:spPr>
@@ -3635,23 +3790,113 @@
           </a:fontRef>
         </p:style>
       </p:cxnSp>
+      <p:sp>
+        <p:nvSpPr>
+          <p:cNvPr id="20" name="Rectangle 19"/>
+          <p:cNvSpPr/>
+          <p:nvPr/>
+        </p:nvSpPr>
+        <p:spPr>
+          <a:xfrm>
+            <a:off x="914400" y="863600"/>
+            <a:ext cx="3060700" cy="190500"/>
+          </a:xfrm>
+          <a:prstGeom prst="rect">
+            <a:avLst/>
+          </a:prstGeom>
+          <a:solidFill>
+            <a:srgbClr val="CCE5F3"/>
+          </a:solidFill>
+          <a:ln w="6985">
+            <a:solidFill>
+              <a:srgbClr val="6C7680"/>
+            </a:solidFill>
+          </a:ln>
+        </p:spPr>
+        <p:style>
+          <a:lnRef idx="1">
+            <a:schemeClr val="accent1"/>
+          </a:lnRef>
+          <a:fillRef idx="3">
+            <a:schemeClr val="accent1"/>
+          </a:fillRef>
+          <a:effectRef idx="2">
+            <a:schemeClr val="accent1"/>
+          </a:effectRef>
+          <a:fontRef idx="minor">
+            <a:schemeClr val="lt1"/>
+          </a:fontRef>
+        </p:style>
+        <p:txBody>
+          <a:bodyPr rtlCol="0" anchor="ctr"/>
+          <a:lstStyle/>
+          <a:p>
+            <a:pPr algn="ctr"/>
+          </a:p>
+        </p:txBody>
+      </p:sp>
+      <p:sp>
+        <p:nvSpPr>
+          <p:cNvPr id="21" name="TextBox 20"/>
+          <p:cNvSpPr txBox="1"/>
+          <p:nvPr/>
+        </p:nvSpPr>
+        <p:spPr>
+          <a:xfrm>
+            <a:off x="4165600" y="876300"/>
+            <a:ext cx="1651000" cy="177800"/>
+          </a:xfrm>
+          <a:prstGeom prst="rect">
+            <a:avLst/>
+          </a:prstGeom>
+          <a:noFill/>
+        </p:spPr>
+        <p:txBody>
+          <a:bodyPr wrap="none" lIns="0" rIns="0" tIns="0" bIns="0">
+            <a:noAutofit/>
+          </a:bodyPr>
+          <a:lstStyle/>
+          <a:p>
+            <a:pPr algn="l">
+              <a:lnSpc>
+                <a:spcPts val="1188"/>
+              </a:lnSpc>
+              <a:spcBef>
+                <a:spcPts val="0"/>
+              </a:spcBef>
+              <a:spcAft>
+                <a:spcPts val="0"/>
+              </a:spcAft>
+            </a:pPr>
+            <a:r>
+              <a:rPr sz="1080" b="0" i="0">
+                <a:solidFill>
+                  <a:srgbClr val="243343"/>
+                </a:solidFill>
+                <a:latin typeface="Arial"/>
+              </a:rPr>
+              <a:t>Outer rubber</a:t>
+            </a:r>
+          </a:p>
+        </p:txBody>
+      </p:sp>
       <p:cxnSp>
         <p:nvCxnSpPr>
-          <p:cNvPr id="17" name="Connector 16"/>
+          <p:cNvPr id="22" name="Connector 21"/>
           <p:cNvCxnSpPr/>
           <p:nvPr/>
         </p:nvCxnSpPr>
         <p:spPr>
           <a:xfrm>
-            <a:off x="2844000" y="699300"/>
-            <a:ext cx="237000" cy="581400"/>
+            <a:off x="3975100" y="958850"/>
+            <a:ext cx="127000" cy="0"/>
           </a:xfrm>
           <a:prstGeom prst="line">
             <a:avLst/>
           </a:prstGeom>
-          <a:ln w="12700">
+          <a:ln w="8890">
             <a:solidFill>
-              <a:srgbClr val="1F1F1F"/>
+              <a:srgbClr val="243343"/>
             </a:solidFill>
           </a:ln>
         </p:spPr>
@@ -3670,23 +3915,113 @@
           </a:fontRef>
         </p:style>
       </p:cxnSp>
+      <p:sp>
+        <p:nvSpPr>
+          <p:cNvPr id="23" name="Rectangle 22"/>
+          <p:cNvSpPr/>
+          <p:nvPr/>
+        </p:nvSpPr>
+        <p:spPr>
+          <a:xfrm>
+            <a:off x="914400" y="1054100"/>
+            <a:ext cx="3060700" cy="190500"/>
+          </a:xfrm>
+          <a:prstGeom prst="rect">
+            <a:avLst/>
+          </a:prstGeom>
+          <a:solidFill>
+            <a:srgbClr val="F6D7C8"/>
+          </a:solidFill>
+          <a:ln w="6985">
+            <a:solidFill>
+              <a:srgbClr val="6C7680"/>
+            </a:solidFill>
+          </a:ln>
+        </p:spPr>
+        <p:style>
+          <a:lnRef idx="1">
+            <a:schemeClr val="accent1"/>
+          </a:lnRef>
+          <a:fillRef idx="3">
+            <a:schemeClr val="accent1"/>
+          </a:fillRef>
+          <a:effectRef idx="2">
+            <a:schemeClr val="accent1"/>
+          </a:effectRef>
+          <a:fontRef idx="minor">
+            <a:schemeClr val="lt1"/>
+          </a:fontRef>
+        </p:style>
+        <p:txBody>
+          <a:bodyPr rtlCol="0" anchor="ctr"/>
+          <a:lstStyle/>
+          <a:p>
+            <a:pPr algn="ctr"/>
+          </a:p>
+        </p:txBody>
+      </p:sp>
+      <p:sp>
+        <p:nvSpPr>
+          <p:cNvPr id="24" name="TextBox 23"/>
+          <p:cNvSpPr txBox="1"/>
+          <p:nvPr/>
+        </p:nvSpPr>
+        <p:spPr>
+          <a:xfrm>
+            <a:off x="4165600" y="1066800"/>
+            <a:ext cx="1651000" cy="177800"/>
+          </a:xfrm>
+          <a:prstGeom prst="rect">
+            <a:avLst/>
+          </a:prstGeom>
+          <a:noFill/>
+        </p:spPr>
+        <p:txBody>
+          <a:bodyPr wrap="none" lIns="0" rIns="0" tIns="0" bIns="0">
+            <a:noAutofit/>
+          </a:bodyPr>
+          <a:lstStyle/>
+          <a:p>
+            <a:pPr algn="l">
+              <a:lnSpc>
+                <a:spcPts val="1188"/>
+              </a:lnSpc>
+              <a:spcBef>
+                <a:spcPts val="0"/>
+              </a:spcBef>
+              <a:spcAft>
+                <a:spcPts val="0"/>
+              </a:spcAft>
+            </a:pPr>
+            <a:r>
+              <a:rPr sz="1080" b="0" i="0">
+                <a:solidFill>
+                  <a:srgbClr val="243343"/>
+                </a:solidFill>
+                <a:latin typeface="Arial"/>
+              </a:rPr>
+              <a:t>Aramid helix (+θ)</a:t>
+            </a:r>
+          </a:p>
+        </p:txBody>
+      </p:sp>
       <p:cxnSp>
         <p:nvCxnSpPr>
-          <p:cNvPr id="18" name="Connector 17"/>
+          <p:cNvPr id="25" name="Connector 24"/>
           <p:cNvCxnSpPr/>
           <p:nvPr/>
         </p:nvCxnSpPr>
         <p:spPr>
-          <a:xfrm flipV="1">
-            <a:off x="2844000" y="699300"/>
-            <a:ext cx="237000" cy="581400"/>
+          <a:xfrm>
+            <a:off x="3975100" y="1149350"/>
+            <a:ext cx="127000" cy="0"/>
           </a:xfrm>
           <a:prstGeom prst="line">
             <a:avLst/>
           </a:prstGeom>
-          <a:ln w="12700">
+          <a:ln w="8890">
             <a:solidFill>
-              <a:srgbClr val="1F1F1F"/>
+              <a:srgbClr val="243343"/>
             </a:solidFill>
           </a:ln>
         </p:spPr>
@@ -3705,23 +4040,113 @@
           </a:fontRef>
         </p:style>
       </p:cxnSp>
+      <p:sp>
+        <p:nvSpPr>
+          <p:cNvPr id="26" name="Rectangle 25"/>
+          <p:cNvSpPr/>
+          <p:nvPr/>
+        </p:nvSpPr>
+        <p:spPr>
+          <a:xfrm>
+            <a:off x="914400" y="1244600"/>
+            <a:ext cx="3060700" cy="190500"/>
+          </a:xfrm>
+          <a:prstGeom prst="rect">
+            <a:avLst/>
+          </a:prstGeom>
+          <a:solidFill>
+            <a:srgbClr val="CCE5F3"/>
+          </a:solidFill>
+          <a:ln w="6985">
+            <a:solidFill>
+              <a:srgbClr val="6C7680"/>
+            </a:solidFill>
+          </a:ln>
+        </p:spPr>
+        <p:style>
+          <a:lnRef idx="1">
+            <a:schemeClr val="accent1"/>
+          </a:lnRef>
+          <a:fillRef idx="3">
+            <a:schemeClr val="accent1"/>
+          </a:fillRef>
+          <a:effectRef idx="2">
+            <a:schemeClr val="accent1"/>
+          </a:effectRef>
+          <a:fontRef idx="minor">
+            <a:schemeClr val="lt1"/>
+          </a:fontRef>
+        </p:style>
+        <p:txBody>
+          <a:bodyPr rtlCol="0" anchor="ctr"/>
+          <a:lstStyle/>
+          <a:p>
+            <a:pPr algn="ctr"/>
+          </a:p>
+        </p:txBody>
+      </p:sp>
+      <p:sp>
+        <p:nvSpPr>
+          <p:cNvPr id="27" name="TextBox 26"/>
+          <p:cNvSpPr txBox="1"/>
+          <p:nvPr/>
+        </p:nvSpPr>
+        <p:spPr>
+          <a:xfrm>
+            <a:off x="4165600" y="1257300"/>
+            <a:ext cx="1651000" cy="177800"/>
+          </a:xfrm>
+          <a:prstGeom prst="rect">
+            <a:avLst/>
+          </a:prstGeom>
+          <a:noFill/>
+        </p:spPr>
+        <p:txBody>
+          <a:bodyPr wrap="none" lIns="0" rIns="0" tIns="0" bIns="0">
+            <a:noAutofit/>
+          </a:bodyPr>
+          <a:lstStyle/>
+          <a:p>
+            <a:pPr algn="l">
+              <a:lnSpc>
+                <a:spcPts val="1188"/>
+              </a:lnSpc>
+              <a:spcBef>
+                <a:spcPts val="0"/>
+              </a:spcBef>
+              <a:spcAft>
+                <a:spcPts val="0"/>
+              </a:spcAft>
+            </a:pPr>
+            <a:r>
+              <a:rPr sz="1080" b="0" i="0">
+                <a:solidFill>
+                  <a:srgbClr val="243343"/>
+                </a:solidFill>
+                <a:latin typeface="Arial"/>
+              </a:rPr>
+              <a:t>Middle rubber</a:t>
+            </a:r>
+          </a:p>
+        </p:txBody>
+      </p:sp>
       <p:cxnSp>
         <p:nvCxnSpPr>
-          <p:cNvPr id="19" name="Connector 18"/>
+          <p:cNvPr id="28" name="Connector 27"/>
           <p:cNvCxnSpPr/>
           <p:nvPr/>
         </p:nvCxnSpPr>
         <p:spPr>
           <a:xfrm>
-            <a:off x="3081000" y="699300"/>
-            <a:ext cx="237000" cy="581400"/>
+            <a:off x="3975100" y="1339850"/>
+            <a:ext cx="127000" cy="0"/>
           </a:xfrm>
           <a:prstGeom prst="line">
             <a:avLst/>
           </a:prstGeom>
-          <a:ln w="12700">
+          <a:ln w="8890">
             <a:solidFill>
-              <a:srgbClr val="1F1F1F"/>
+              <a:srgbClr val="243343"/>
             </a:solidFill>
           </a:ln>
         </p:spPr>
@@ -3740,23 +4165,113 @@
           </a:fontRef>
         </p:style>
       </p:cxnSp>
+      <p:sp>
+        <p:nvSpPr>
+          <p:cNvPr id="29" name="Rectangle 28"/>
+          <p:cNvSpPr/>
+          <p:nvPr/>
+        </p:nvSpPr>
+        <p:spPr>
+          <a:xfrm>
+            <a:off x="914400" y="1435100"/>
+            <a:ext cx="3060700" cy="190500"/>
+          </a:xfrm>
+          <a:prstGeom prst="rect">
+            <a:avLst/>
+          </a:prstGeom>
+          <a:solidFill>
+            <a:srgbClr val="FAEABB"/>
+          </a:solidFill>
+          <a:ln w="6985">
+            <a:solidFill>
+              <a:srgbClr val="6C7680"/>
+            </a:solidFill>
+          </a:ln>
+        </p:spPr>
+        <p:style>
+          <a:lnRef idx="1">
+            <a:schemeClr val="accent1"/>
+          </a:lnRef>
+          <a:fillRef idx="3">
+            <a:schemeClr val="accent1"/>
+          </a:fillRef>
+          <a:effectRef idx="2">
+            <a:schemeClr val="accent1"/>
+          </a:effectRef>
+          <a:fontRef idx="minor">
+            <a:schemeClr val="lt1"/>
+          </a:fontRef>
+        </p:style>
+        <p:txBody>
+          <a:bodyPr rtlCol="0" anchor="ctr"/>
+          <a:lstStyle/>
+          <a:p>
+            <a:pPr algn="ctr"/>
+          </a:p>
+        </p:txBody>
+      </p:sp>
+      <p:sp>
+        <p:nvSpPr>
+          <p:cNvPr id="30" name="TextBox 29"/>
+          <p:cNvSpPr txBox="1"/>
+          <p:nvPr/>
+        </p:nvSpPr>
+        <p:spPr>
+          <a:xfrm>
+            <a:off x="4165600" y="1447800"/>
+            <a:ext cx="1651000" cy="177800"/>
+          </a:xfrm>
+          <a:prstGeom prst="rect">
+            <a:avLst/>
+          </a:prstGeom>
+          <a:noFill/>
+        </p:spPr>
+        <p:txBody>
+          <a:bodyPr wrap="none" lIns="0" rIns="0" tIns="0" bIns="0">
+            <a:noAutofit/>
+          </a:bodyPr>
+          <a:lstStyle/>
+          <a:p>
+            <a:pPr algn="l">
+              <a:lnSpc>
+                <a:spcPts val="1188"/>
+              </a:lnSpc>
+              <a:spcBef>
+                <a:spcPts val="0"/>
+              </a:spcBef>
+              <a:spcAft>
+                <a:spcPts val="0"/>
+              </a:spcAft>
+            </a:pPr>
+            <a:r>
+              <a:rPr sz="1080" b="0" i="0">
+                <a:solidFill>
+                  <a:srgbClr val="243343"/>
+                </a:solidFill>
+                <a:latin typeface="Arial"/>
+              </a:rPr>
+              <a:t>Inner helix (−θ)</a:t>
+            </a:r>
+          </a:p>
+        </p:txBody>
+      </p:sp>
       <p:cxnSp>
         <p:nvCxnSpPr>
-          <p:cNvPr id="20" name="Connector 19"/>
+          <p:cNvPr id="31" name="Connector 30"/>
           <p:cNvCxnSpPr/>
           <p:nvPr/>
         </p:nvCxnSpPr>
         <p:spPr>
-          <a:xfrm flipV="1">
-            <a:off x="3081000" y="699300"/>
-            <a:ext cx="237000" cy="581400"/>
+          <a:xfrm>
+            <a:off x="3975100" y="1530350"/>
+            <a:ext cx="127000" cy="0"/>
           </a:xfrm>
           <a:prstGeom prst="line">
             <a:avLst/>
           </a:prstGeom>
-          <a:ln w="12700">
+          <a:ln w="8890">
             <a:solidFill>
-              <a:srgbClr val="1F1F1F"/>
+              <a:srgbClr val="243343"/>
             </a:solidFill>
           </a:ln>
         </p:spPr>
@@ -3775,306 +4290,26 @@
           </a:fontRef>
         </p:style>
       </p:cxnSp>
-      <p:cxnSp>
-        <p:nvCxnSpPr>
-          <p:cNvPr id="21" name="Connector 20"/>
-          <p:cNvCxnSpPr/>
-          <p:nvPr/>
-        </p:nvCxnSpPr>
-        <p:spPr>
-          <a:xfrm>
-            <a:off x="3318000" y="699300"/>
-            <a:ext cx="237000" cy="581400"/>
-          </a:xfrm>
-          <a:prstGeom prst="line">
-            <a:avLst/>
-          </a:prstGeom>
-          <a:ln w="12700">
-            <a:solidFill>
-              <a:srgbClr val="1F1F1F"/>
-            </a:solidFill>
-          </a:ln>
-        </p:spPr>
-        <p:style>
-          <a:lnRef idx="2">
-            <a:schemeClr val="accent1"/>
-          </a:lnRef>
-          <a:fillRef idx="0">
-            <a:schemeClr val="accent1"/>
-          </a:fillRef>
-          <a:effectRef idx="1">
-            <a:schemeClr val="accent1"/>
-          </a:effectRef>
-          <a:fontRef idx="minor">
-            <a:schemeClr val="tx1"/>
-          </a:fontRef>
-        </p:style>
-      </p:cxnSp>
-      <p:cxnSp>
-        <p:nvCxnSpPr>
-          <p:cNvPr id="22" name="Connector 21"/>
-          <p:cNvCxnSpPr/>
-          <p:nvPr/>
-        </p:nvCxnSpPr>
-        <p:spPr>
-          <a:xfrm flipV="1">
-            <a:off x="3318000" y="699300"/>
-            <a:ext cx="237000" cy="581400"/>
-          </a:xfrm>
-          <a:prstGeom prst="line">
-            <a:avLst/>
-          </a:prstGeom>
-          <a:ln w="12700">
-            <a:solidFill>
-              <a:srgbClr val="1F1F1F"/>
-            </a:solidFill>
-          </a:ln>
-        </p:spPr>
-        <p:style>
-          <a:lnRef idx="2">
-            <a:schemeClr val="accent1"/>
-          </a:lnRef>
-          <a:fillRef idx="0">
-            <a:schemeClr val="accent1"/>
-          </a:fillRef>
-          <a:effectRef idx="1">
-            <a:schemeClr val="accent1"/>
-          </a:effectRef>
-          <a:fontRef idx="minor">
-            <a:schemeClr val="tx1"/>
-          </a:fontRef>
-        </p:style>
-      </p:cxnSp>
-      <p:cxnSp>
-        <p:nvCxnSpPr>
-          <p:cNvPr id="23" name="Connector 22"/>
-          <p:cNvCxnSpPr/>
-          <p:nvPr/>
-        </p:nvCxnSpPr>
-        <p:spPr>
-          <a:xfrm>
-            <a:off x="3555000" y="699300"/>
-            <a:ext cx="237000" cy="581400"/>
-          </a:xfrm>
-          <a:prstGeom prst="line">
-            <a:avLst/>
-          </a:prstGeom>
-          <a:ln w="12700">
-            <a:solidFill>
-              <a:srgbClr val="1F1F1F"/>
-            </a:solidFill>
-          </a:ln>
-        </p:spPr>
-        <p:style>
-          <a:lnRef idx="2">
-            <a:schemeClr val="accent1"/>
-          </a:lnRef>
-          <a:fillRef idx="0">
-            <a:schemeClr val="accent1"/>
-          </a:fillRef>
-          <a:effectRef idx="1">
-            <a:schemeClr val="accent1"/>
-          </a:effectRef>
-          <a:fontRef idx="minor">
-            <a:schemeClr val="tx1"/>
-          </a:fontRef>
-        </p:style>
-      </p:cxnSp>
-      <p:cxnSp>
-        <p:nvCxnSpPr>
-          <p:cNvPr id="24" name="Connector 23"/>
-          <p:cNvCxnSpPr/>
-          <p:nvPr/>
-        </p:nvCxnSpPr>
-        <p:spPr>
-          <a:xfrm flipV="1">
-            <a:off x="3555000" y="699300"/>
-            <a:ext cx="237000" cy="581400"/>
-          </a:xfrm>
-          <a:prstGeom prst="line">
-            <a:avLst/>
-          </a:prstGeom>
-          <a:ln w="12700">
-            <a:solidFill>
-              <a:srgbClr val="1F1F1F"/>
-            </a:solidFill>
-          </a:ln>
-        </p:spPr>
-        <p:style>
-          <a:lnRef idx="2">
-            <a:schemeClr val="accent1"/>
-          </a:lnRef>
-          <a:fillRef idx="0">
-            <a:schemeClr val="accent1"/>
-          </a:fillRef>
-          <a:effectRef idx="1">
-            <a:schemeClr val="accent1"/>
-          </a:effectRef>
-          <a:fontRef idx="minor">
-            <a:schemeClr val="tx1"/>
-          </a:fontRef>
-        </p:style>
-      </p:cxnSp>
-      <p:cxnSp>
-        <p:nvCxnSpPr>
-          <p:cNvPr id="25" name="Connector 24"/>
-          <p:cNvCxnSpPr/>
-          <p:nvPr/>
-        </p:nvCxnSpPr>
-        <p:spPr>
-          <a:xfrm>
-            <a:off x="3792000" y="699300"/>
-            <a:ext cx="237000" cy="581400"/>
-          </a:xfrm>
-          <a:prstGeom prst="line">
-            <a:avLst/>
-          </a:prstGeom>
-          <a:ln w="12700">
-            <a:solidFill>
-              <a:srgbClr val="1F1F1F"/>
-            </a:solidFill>
-          </a:ln>
-        </p:spPr>
-        <p:style>
-          <a:lnRef idx="2">
-            <a:schemeClr val="accent1"/>
-          </a:lnRef>
-          <a:fillRef idx="0">
-            <a:schemeClr val="accent1"/>
-          </a:fillRef>
-          <a:effectRef idx="1">
-            <a:schemeClr val="accent1"/>
-          </a:effectRef>
-          <a:fontRef idx="minor">
-            <a:schemeClr val="tx1"/>
-          </a:fontRef>
-        </p:style>
-      </p:cxnSp>
-      <p:cxnSp>
-        <p:nvCxnSpPr>
-          <p:cNvPr id="26" name="Connector 25"/>
-          <p:cNvCxnSpPr/>
-          <p:nvPr/>
-        </p:nvCxnSpPr>
-        <p:spPr>
-          <a:xfrm flipV="1">
-            <a:off x="3792000" y="699300"/>
-            <a:ext cx="237000" cy="581400"/>
-          </a:xfrm>
-          <a:prstGeom prst="line">
-            <a:avLst/>
-          </a:prstGeom>
-          <a:ln w="12700">
-            <a:solidFill>
-              <a:srgbClr val="1F1F1F"/>
-            </a:solidFill>
-          </a:ln>
-        </p:spPr>
-        <p:style>
-          <a:lnRef idx="2">
-            <a:schemeClr val="accent1"/>
-          </a:lnRef>
-          <a:fillRef idx="0">
-            <a:schemeClr val="accent1"/>
-          </a:fillRef>
-          <a:effectRef idx="1">
-            <a:schemeClr val="accent1"/>
-          </a:effectRef>
-          <a:fontRef idx="minor">
-            <a:schemeClr val="tx1"/>
-          </a:fontRef>
-        </p:style>
-      </p:cxnSp>
-      <p:cxnSp>
-        <p:nvCxnSpPr>
-          <p:cNvPr id="27" name="Connector 26"/>
-          <p:cNvCxnSpPr/>
-          <p:nvPr/>
-        </p:nvCxnSpPr>
-        <p:spPr>
-          <a:xfrm>
-            <a:off x="4029000" y="699300"/>
-            <a:ext cx="237000" cy="581400"/>
-          </a:xfrm>
-          <a:prstGeom prst="line">
-            <a:avLst/>
-          </a:prstGeom>
-          <a:ln w="12700">
-            <a:solidFill>
-              <a:srgbClr val="1F1F1F"/>
-            </a:solidFill>
-          </a:ln>
-        </p:spPr>
-        <p:style>
-          <a:lnRef idx="2">
-            <a:schemeClr val="accent1"/>
-          </a:lnRef>
-          <a:fillRef idx="0">
-            <a:schemeClr val="accent1"/>
-          </a:fillRef>
-          <a:effectRef idx="1">
-            <a:schemeClr val="accent1"/>
-          </a:effectRef>
-          <a:fontRef idx="minor">
-            <a:schemeClr val="tx1"/>
-          </a:fontRef>
-        </p:style>
-      </p:cxnSp>
-      <p:cxnSp>
-        <p:nvCxnSpPr>
-          <p:cNvPr id="28" name="Connector 27"/>
-          <p:cNvCxnSpPr/>
-          <p:nvPr/>
-        </p:nvCxnSpPr>
-        <p:spPr>
-          <a:xfrm flipV="1">
-            <a:off x="4029000" y="699300"/>
-            <a:ext cx="237000" cy="581400"/>
-          </a:xfrm>
-          <a:prstGeom prst="line">
-            <a:avLst/>
-          </a:prstGeom>
-          <a:ln w="12700">
-            <a:solidFill>
-              <a:srgbClr val="1F1F1F"/>
-            </a:solidFill>
-          </a:ln>
-        </p:spPr>
-        <p:style>
-          <a:lnRef idx="2">
-            <a:schemeClr val="accent1"/>
-          </a:lnRef>
-          <a:fillRef idx="0">
-            <a:schemeClr val="accent1"/>
-          </a:fillRef>
-          <a:effectRef idx="1">
-            <a:schemeClr val="accent1"/>
-          </a:effectRef>
-          <a:fontRef idx="minor">
-            <a:schemeClr val="tx1"/>
-          </a:fontRef>
-        </p:style>
-      </p:cxnSp>
-      <p:sp>
-        <p:nvSpPr>
-          <p:cNvPr id="29" name="Rectangle 28"/>
+      <p:sp>
+        <p:nvSpPr>
+          <p:cNvPr id="32" name="Rectangle 31"/>
           <p:cNvSpPr/>
           <p:nvPr/>
         </p:nvSpPr>
         <p:spPr>
           <a:xfrm>
-            <a:off x="972000" y="576000"/>
-            <a:ext cx="360000" cy="827999"/>
+            <a:off x="914400" y="1625600"/>
+            <a:ext cx="3060700" cy="190500"/>
           </a:xfrm>
           <a:prstGeom prst="rect">
             <a:avLst/>
           </a:prstGeom>
           <a:solidFill>
-            <a:srgbClr val="C9C9C9"/>
+            <a:srgbClr val="CCE5F3"/>
           </a:solidFill>
-          <a:ln w="12700">
+          <a:ln w="6985">
             <a:solidFill>
-              <a:srgbClr val="1F1F1F"/>
+              <a:srgbClr val="6C7680"/>
             </a:solidFill>
           </a:ln>
         </p:spPr>
@@ -4100,146 +4335,51 @@
           </a:p>
         </p:txBody>
       </p:sp>
-      <p:cxnSp>
-        <p:nvCxnSpPr>
-          <p:cNvPr id="30" name="Connector 29"/>
-          <p:cNvCxnSpPr/>
+      <p:sp>
+        <p:nvSpPr>
+          <p:cNvPr id="33" name="TextBox 32"/>
+          <p:cNvSpPr txBox="1"/>
           <p:nvPr/>
-        </p:nvCxnSpPr>
-        <p:spPr>
-          <a:xfrm>
-            <a:off x="846000" y="503999"/>
-            <a:ext cx="126000" cy="108000"/>
-          </a:xfrm>
-          <a:prstGeom prst="line">
-            <a:avLst/>
-          </a:prstGeom>
-          <a:ln w="12700">
-            <a:solidFill>
-              <a:srgbClr val="1F1F1F"/>
-            </a:solidFill>
-          </a:ln>
-        </p:spPr>
-        <p:style>
-          <a:lnRef idx="2">
-            <a:schemeClr val="accent1"/>
-          </a:lnRef>
-          <a:fillRef idx="0">
-            <a:schemeClr val="accent1"/>
-          </a:fillRef>
-          <a:effectRef idx="1">
-            <a:schemeClr val="accent1"/>
-          </a:effectRef>
-          <a:fontRef idx="minor">
-            <a:schemeClr val="tx1"/>
-          </a:fontRef>
-        </p:style>
-      </p:cxnSp>
-      <p:cxnSp>
-        <p:nvCxnSpPr>
-          <p:cNvPr id="31" name="Connector 30"/>
-          <p:cNvCxnSpPr/>
-          <p:nvPr/>
-        </p:nvCxnSpPr>
-        <p:spPr>
-          <a:xfrm>
-            <a:off x="846000" y="648000"/>
-            <a:ext cx="126000" cy="108000"/>
-          </a:xfrm>
-          <a:prstGeom prst="line">
-            <a:avLst/>
-          </a:prstGeom>
-          <a:ln w="12700">
-            <a:solidFill>
-              <a:srgbClr val="1F1F1F"/>
-            </a:solidFill>
-          </a:ln>
-        </p:spPr>
-        <p:style>
-          <a:lnRef idx="2">
-            <a:schemeClr val="accent1"/>
-          </a:lnRef>
-          <a:fillRef idx="0">
-            <a:schemeClr val="accent1"/>
-          </a:fillRef>
-          <a:effectRef idx="1">
-            <a:schemeClr val="accent1"/>
-          </a:effectRef>
-          <a:fontRef idx="minor">
-            <a:schemeClr val="tx1"/>
-          </a:fontRef>
-        </p:style>
-      </p:cxnSp>
-      <p:cxnSp>
-        <p:nvCxnSpPr>
-          <p:cNvPr id="32" name="Connector 31"/>
-          <p:cNvCxnSpPr/>
-          <p:nvPr/>
-        </p:nvCxnSpPr>
-        <p:spPr>
-          <a:xfrm>
-            <a:off x="846000" y="792000"/>
-            <a:ext cx="126000" cy="108000"/>
-          </a:xfrm>
-          <a:prstGeom prst="line">
-            <a:avLst/>
-          </a:prstGeom>
-          <a:ln w="12700">
-            <a:solidFill>
-              <a:srgbClr val="1F1F1F"/>
-            </a:solidFill>
-          </a:ln>
-        </p:spPr>
-        <p:style>
-          <a:lnRef idx="2">
-            <a:schemeClr val="accent1"/>
-          </a:lnRef>
-          <a:fillRef idx="0">
-            <a:schemeClr val="accent1"/>
-          </a:fillRef>
-          <a:effectRef idx="1">
-            <a:schemeClr val="accent1"/>
-          </a:effectRef>
-          <a:fontRef idx="minor">
-            <a:schemeClr val="tx1"/>
-          </a:fontRef>
-        </p:style>
-      </p:cxnSp>
-      <p:cxnSp>
-        <p:nvCxnSpPr>
-          <p:cNvPr id="33" name="Connector 32"/>
-          <p:cNvCxnSpPr/>
-          <p:nvPr/>
-        </p:nvCxnSpPr>
-        <p:spPr>
-          <a:xfrm>
-            <a:off x="846000" y="936000"/>
-            <a:ext cx="126000" cy="108000"/>
-          </a:xfrm>
-          <a:prstGeom prst="line">
-            <a:avLst/>
-          </a:prstGeom>
-          <a:ln w="12700">
-            <a:solidFill>
-              <a:srgbClr val="1F1F1F"/>
-            </a:solidFill>
-          </a:ln>
-        </p:spPr>
-        <p:style>
-          <a:lnRef idx="2">
-            <a:schemeClr val="accent1"/>
-          </a:lnRef>
-          <a:fillRef idx="0">
-            <a:schemeClr val="accent1"/>
-          </a:fillRef>
-          <a:effectRef idx="1">
-            <a:schemeClr val="accent1"/>
-          </a:effectRef>
-          <a:fontRef idx="minor">
-            <a:schemeClr val="tx1"/>
-          </a:fontRef>
-        </p:style>
-      </p:cxnSp>
+        </p:nvSpPr>
+        <p:spPr>
+          <a:xfrm>
+            <a:off x="4165600" y="1638300"/>
+            <a:ext cx="1651000" cy="177800"/>
+          </a:xfrm>
+          <a:prstGeom prst="rect">
+            <a:avLst/>
+          </a:prstGeom>
+          <a:noFill/>
+        </p:spPr>
+        <p:txBody>
+          <a:bodyPr wrap="none" lIns="0" rIns="0" tIns="0" bIns="0">
+            <a:noAutofit/>
+          </a:bodyPr>
+          <a:lstStyle/>
+          <a:p>
+            <a:pPr algn="l">
+              <a:lnSpc>
+                <a:spcPts val="1188"/>
+              </a:lnSpc>
+              <a:spcBef>
+                <a:spcPts val="0"/>
+              </a:spcBef>
+              <a:spcAft>
+                <a:spcPts val="0"/>
+              </a:spcAft>
+            </a:pPr>
+            <a:r>
+              <a:rPr sz="1080" b="0" i="0">
+                <a:solidFill>
+                  <a:srgbClr val="243343"/>
+                </a:solidFill>
+                <a:latin typeface="Arial"/>
+              </a:rPr>
+              <a:t>Inner rubber</a:t>
+            </a:r>
+          </a:p>
+        </p:txBody>
+      </p:sp>
       <p:cxnSp>
         <p:nvCxnSpPr>
           <p:cNvPr id="34" name="Connector 33"/>
@@ -4248,15 +4388,15 @@
         </p:nvCxnSpPr>
         <p:spPr>
           <a:xfrm>
-            <a:off x="846000" y="1080000"/>
-            <a:ext cx="126000" cy="108000"/>
+            <a:off x="3975100" y="1720850"/>
+            <a:ext cx="127000" cy="0"/>
           </a:xfrm>
           <a:prstGeom prst="line">
             <a:avLst/>
           </a:prstGeom>
-          <a:ln w="12700">
+          <a:ln w="8890">
             <a:solidFill>
-              <a:srgbClr val="1F1F1F"/>
+              <a:srgbClr val="243343"/>
             </a:solidFill>
           </a:ln>
         </p:spPr>
@@ -4283,15 +4423,15 @@
         </p:nvCxnSpPr>
         <p:spPr>
           <a:xfrm>
-            <a:off x="846000" y="1224000"/>
-            <a:ext cx="126000" cy="108000"/>
+            <a:off x="1155700" y="825500"/>
+            <a:ext cx="0" cy="76200"/>
           </a:xfrm>
           <a:prstGeom prst="line">
             <a:avLst/>
           </a:prstGeom>
-          <a:ln w="12700">
+          <a:ln w="25400">
             <a:solidFill>
-              <a:srgbClr val="1F1F1F"/>
+              <a:srgbClr val="D55E00"/>
             </a:solidFill>
           </a:ln>
         </p:spPr>
@@ -4318,15 +4458,15 @@
         </p:nvCxnSpPr>
         <p:spPr>
           <a:xfrm>
-            <a:off x="846000" y="1368000"/>
-            <a:ext cx="126000" cy="108000"/>
+            <a:off x="1155700" y="1016000"/>
+            <a:ext cx="0" cy="76200"/>
           </a:xfrm>
           <a:prstGeom prst="line">
             <a:avLst/>
           </a:prstGeom>
-          <a:ln w="12700">
+          <a:ln w="25400">
             <a:solidFill>
-              <a:srgbClr val="1F1F1F"/>
+              <a:srgbClr val="D55E00"/>
             </a:solidFill>
           </a:ln>
         </p:spPr>
@@ -4345,51 +4485,41 @@
           </a:fontRef>
         </p:style>
       </p:cxnSp>
-      <p:sp>
-        <p:nvSpPr>
-          <p:cNvPr id="37" name="Rectangle 36"/>
-          <p:cNvSpPr/>
+      <p:cxnSp>
+        <p:nvCxnSpPr>
+          <p:cNvPr id="37" name="Connector 36"/>
+          <p:cNvCxnSpPr/>
           <p:nvPr/>
-        </p:nvSpPr>
-        <p:spPr>
-          <a:xfrm>
-            <a:off x="4284000" y="576000"/>
-            <a:ext cx="360000" cy="827999"/>
-          </a:xfrm>
-          <a:prstGeom prst="rect">
-            <a:avLst/>
-          </a:prstGeom>
-          <a:solidFill>
-            <a:srgbClr val="C9C9C9"/>
-          </a:solidFill>
-          <a:ln w="12700">
+        </p:nvCxnSpPr>
+        <p:spPr>
+          <a:xfrm>
+            <a:off x="1155700" y="1206500"/>
+            <a:ext cx="0" cy="76200"/>
+          </a:xfrm>
+          <a:prstGeom prst="line">
+            <a:avLst/>
+          </a:prstGeom>
+          <a:ln w="25400">
             <a:solidFill>
-              <a:srgbClr val="1F1F1F"/>
+              <a:srgbClr val="D55E00"/>
             </a:solidFill>
           </a:ln>
         </p:spPr>
         <p:style>
-          <a:lnRef idx="1">
+          <a:lnRef idx="2">
             <a:schemeClr val="accent1"/>
           </a:lnRef>
-          <a:fillRef idx="3">
+          <a:fillRef idx="0">
             <a:schemeClr val="accent1"/>
           </a:fillRef>
-          <a:effectRef idx="2">
+          <a:effectRef idx="1">
             <a:schemeClr val="accent1"/>
           </a:effectRef>
           <a:fontRef idx="minor">
-            <a:schemeClr val="lt1"/>
+            <a:schemeClr val="tx1"/>
           </a:fontRef>
         </p:style>
-        <p:txBody>
-          <a:bodyPr rtlCol="0" anchor="ctr"/>
-          <a:lstStyle/>
-          <a:p>
-            <a:pPr algn="ctr"/>
-          </a:p>
-        </p:txBody>
-      </p:sp>
+      </p:cxnSp>
       <p:cxnSp>
         <p:nvCxnSpPr>
           <p:cNvPr id="38" name="Connector 37"/>
@@ -4398,15 +4528,15 @@
         </p:nvCxnSpPr>
         <p:spPr>
           <a:xfrm>
-            <a:off x="4158000" y="503999"/>
-            <a:ext cx="126000" cy="108000"/>
+            <a:off x="1155700" y="1397000"/>
+            <a:ext cx="0" cy="76200"/>
           </a:xfrm>
           <a:prstGeom prst="line">
             <a:avLst/>
           </a:prstGeom>
-          <a:ln w="12700">
+          <a:ln w="25400">
             <a:solidFill>
-              <a:srgbClr val="1F1F1F"/>
+              <a:srgbClr val="D55E00"/>
             </a:solidFill>
           </a:ln>
         </p:spPr>
@@ -4433,15 +4563,15 @@
         </p:nvCxnSpPr>
         <p:spPr>
           <a:xfrm>
-            <a:off x="4158000" y="648000"/>
-            <a:ext cx="126000" cy="108000"/>
+            <a:off x="1155700" y="1587500"/>
+            <a:ext cx="0" cy="76200"/>
           </a:xfrm>
           <a:prstGeom prst="line">
             <a:avLst/>
           </a:prstGeom>
-          <a:ln w="12700">
+          <a:ln w="25400">
             <a:solidFill>
-              <a:srgbClr val="1F1F1F"/>
+              <a:srgbClr val="D55E00"/>
             </a:solidFill>
           </a:ln>
         </p:spPr>
@@ -4460,41 +4590,51 @@
           </a:fontRef>
         </p:style>
       </p:cxnSp>
-      <p:cxnSp>
-        <p:nvCxnSpPr>
-          <p:cNvPr id="40" name="Connector 39"/>
-          <p:cNvCxnSpPr/>
+      <p:sp>
+        <p:nvSpPr>
+          <p:cNvPr id="40" name="TextBox 39"/>
+          <p:cNvSpPr txBox="1"/>
           <p:nvPr/>
-        </p:nvCxnSpPr>
-        <p:spPr>
-          <a:xfrm>
-            <a:off x="4158000" y="792000"/>
-            <a:ext cx="126000" cy="108000"/>
-          </a:xfrm>
-          <a:prstGeom prst="line">
-            <a:avLst/>
-          </a:prstGeom>
-          <a:ln w="12700">
-            <a:solidFill>
-              <a:srgbClr val="1F1F1F"/>
-            </a:solidFill>
-          </a:ln>
-        </p:spPr>
-        <p:style>
-          <a:lnRef idx="2">
-            <a:schemeClr val="accent1"/>
-          </a:lnRef>
-          <a:fillRef idx="0">
-            <a:schemeClr val="accent1"/>
-          </a:fillRef>
-          <a:effectRef idx="1">
-            <a:schemeClr val="accent1"/>
-          </a:effectRef>
-          <a:fontRef idx="minor">
-            <a:schemeClr val="tx1"/>
-          </a:fontRef>
-        </p:style>
-      </p:cxnSp>
+        </p:nvSpPr>
+        <p:spPr>
+          <a:xfrm>
+            <a:off x="1041400" y="342900"/>
+            <a:ext cx="2794000" cy="215900"/>
+          </a:xfrm>
+          <a:prstGeom prst="rect">
+            <a:avLst/>
+          </a:prstGeom>
+          <a:noFill/>
+        </p:spPr>
+        <p:txBody>
+          <a:bodyPr wrap="none" lIns="0" rIns="0" tIns="0" bIns="0">
+            <a:noAutofit/>
+          </a:bodyPr>
+          <a:lstStyle/>
+          <a:p>
+            <a:pPr algn="l">
+              <a:lnSpc>
+                <a:spcPts val="1188"/>
+              </a:lnSpc>
+              <a:spcBef>
+                <a:spcPts val="0"/>
+              </a:spcBef>
+              <a:spcAft>
+                <a:spcPts val="0"/>
+              </a:spcAft>
+            </a:pPr>
+            <a:r>
+              <a:rPr sz="1080" b="0" i="0">
+                <a:solidFill>
+                  <a:srgbClr val="243343"/>
+                </a:solidFill>
+                <a:latin typeface="Arial"/>
+              </a:rPr>
+              <a:t>Contact elements at layer interfaces</a:t>
+            </a:r>
+          </a:p>
+        </p:txBody>
+      </p:sp>
       <p:cxnSp>
         <p:nvCxnSpPr>
           <p:cNvPr id="41" name="Connector 40"/>
@@ -4503,15 +4643,15 @@
         </p:nvCxnSpPr>
         <p:spPr>
           <a:xfrm>
-            <a:off x="4158000" y="936000"/>
-            <a:ext cx="126000" cy="108000"/>
+            <a:off x="1155700" y="571500"/>
+            <a:ext cx="0" cy="76200"/>
           </a:xfrm>
           <a:prstGeom prst="line">
             <a:avLst/>
           </a:prstGeom>
           <a:ln w="12700">
             <a:solidFill>
-              <a:srgbClr val="1F1F1F"/>
+              <a:srgbClr val="D55E00"/>
             </a:solidFill>
           </a:ln>
         </p:spPr>
@@ -4537,17 +4677,18 @@
           <p:nvPr/>
         </p:nvCxnSpPr>
         <p:spPr>
-          <a:xfrm>
-            <a:off x="4158000" y="1080000"/>
-            <a:ext cx="126000" cy="108000"/>
+          <a:xfrm flipV="1">
+            <a:off x="1524000" y="1816100"/>
+            <a:ext cx="0" cy="342900"/>
           </a:xfrm>
           <a:prstGeom prst="line">
             <a:avLst/>
           </a:prstGeom>
           <a:ln w="12700">
             <a:solidFill>
-              <a:srgbClr val="1F1F1F"/>
+              <a:srgbClr val="0072B2"/>
             </a:solidFill>
+            <a:tailEnd type="triangle" w="sm" len="sm"/>
           </a:ln>
         </p:spPr>
         <p:style>
@@ -4572,17 +4713,18 @@
           <p:nvPr/>
         </p:nvCxnSpPr>
         <p:spPr>
-          <a:xfrm>
-            <a:off x="4158000" y="1224000"/>
-            <a:ext cx="126000" cy="108000"/>
+          <a:xfrm flipV="1">
+            <a:off x="2095500" y="1816100"/>
+            <a:ext cx="0" cy="342900"/>
           </a:xfrm>
           <a:prstGeom prst="line">
             <a:avLst/>
           </a:prstGeom>
           <a:ln w="12700">
             <a:solidFill>
-              <a:srgbClr val="1F1F1F"/>
+              <a:srgbClr val="0072B2"/>
             </a:solidFill>
+            <a:tailEnd type="triangle" w="sm" len="sm"/>
           </a:ln>
         </p:spPr>
         <p:style>
@@ -4607,17 +4749,18 @@
           <p:nvPr/>
         </p:nvCxnSpPr>
         <p:spPr>
-          <a:xfrm>
-            <a:off x="4158000" y="1368000"/>
-            <a:ext cx="126000" cy="108000"/>
+          <a:xfrm flipV="1">
+            <a:off x="2667000" y="1816100"/>
+            <a:ext cx="0" cy="342900"/>
           </a:xfrm>
           <a:prstGeom prst="line">
             <a:avLst/>
           </a:prstGeom>
           <a:ln w="12700">
             <a:solidFill>
-              <a:srgbClr val="1F1F1F"/>
+              <a:srgbClr val="0072B2"/>
             </a:solidFill>
+            <a:tailEnd type="triangle" w="sm" len="sm"/>
           </a:ln>
         </p:spPr>
         <p:style>
@@ -4643,17 +4786,17 @@
         </p:nvCxnSpPr>
         <p:spPr>
           <a:xfrm flipV="1">
-            <a:off x="1655999" y="766800"/>
-            <a:ext cx="0" cy="194400"/>
+            <a:off x="3238500" y="1816100"/>
+            <a:ext cx="0" cy="342900"/>
           </a:xfrm>
           <a:prstGeom prst="line">
             <a:avLst/>
           </a:prstGeom>
           <a:ln w="12700">
             <a:solidFill>
-              <a:srgbClr val="1F1F1F"/>
+              <a:srgbClr val="0072B2"/>
             </a:solidFill>
-            <a:tailEnd type="triangle" w="med" len="med"/>
+            <a:tailEnd type="triangle" w="sm" len="sm"/>
           </a:ln>
         </p:spPr>
         <p:style>
@@ -4671,25 +4814,70 @@
           </a:fontRef>
         </p:style>
       </p:cxnSp>
+      <p:sp>
+        <p:nvSpPr>
+          <p:cNvPr id="46" name="TextBox 45"/>
+          <p:cNvSpPr txBox="1"/>
+          <p:nvPr/>
+        </p:nvSpPr>
+        <p:spPr>
+          <a:xfrm>
+            <a:off x="1930400" y="2209800"/>
+            <a:ext cx="1816100" cy="203200"/>
+          </a:xfrm>
+          <a:prstGeom prst="rect">
+            <a:avLst/>
+          </a:prstGeom>
+          <a:noFill/>
+        </p:spPr>
+        <p:txBody>
+          <a:bodyPr wrap="none" lIns="0" rIns="0" tIns="0" bIns="0">
+            <a:noAutofit/>
+          </a:bodyPr>
+          <a:lstStyle/>
+          <a:p>
+            <a:pPr algn="l">
+              <a:lnSpc>
+                <a:spcPts val="1210"/>
+              </a:lnSpc>
+              <a:spcBef>
+                <a:spcPts val="0"/>
+              </a:spcBef>
+              <a:spcAft>
+                <a:spcPts val="0"/>
+              </a:spcAft>
+            </a:pPr>
+            <a:r>
+              <a:rPr sz="1100" b="0" i="0">
+                <a:solidFill>
+                  <a:srgbClr val="0072B2"/>
+                </a:solidFill>
+                <a:latin typeface="Arial"/>
+              </a:rPr>
+              <a:t>Internal air pressure p</a:t>
+            </a:r>
+          </a:p>
+        </p:txBody>
+      </p:sp>
       <p:cxnSp>
         <p:nvCxnSpPr>
-          <p:cNvPr id="46" name="Connector 45"/>
+          <p:cNvPr id="47" name="Connector 46"/>
           <p:cNvCxnSpPr/>
           <p:nvPr/>
         </p:nvCxnSpPr>
         <p:spPr>
           <a:xfrm>
-            <a:off x="1655999" y="1018800"/>
-            <a:ext cx="0" cy="194400"/>
+            <a:off x="787400" y="2540000"/>
+            <a:ext cx="3187700" cy="0"/>
           </a:xfrm>
           <a:prstGeom prst="line">
             <a:avLst/>
           </a:prstGeom>
           <a:ln w="12700">
             <a:solidFill>
-              <a:srgbClr val="1F1F1F"/>
+              <a:srgbClr val="6C7680"/>
             </a:solidFill>
-            <a:tailEnd type="triangle" w="med" len="med"/>
+            <a:prstDash val="dash"/>
           </a:ln>
         </p:spPr>
         <p:style>
@@ -4707,25 +4895,70 @@
           </a:fontRef>
         </p:style>
       </p:cxnSp>
+      <p:sp>
+        <p:nvSpPr>
+          <p:cNvPr id="48" name="TextBox 47"/>
+          <p:cNvSpPr txBox="1"/>
+          <p:nvPr/>
+        </p:nvSpPr>
+        <p:spPr>
+          <a:xfrm>
+            <a:off x="787400" y="2667000"/>
+            <a:ext cx="3175000" cy="215900"/>
+          </a:xfrm>
+          <a:prstGeom prst="rect">
+            <a:avLst/>
+          </a:prstGeom>
+          <a:noFill/>
+        </p:spPr>
+        <p:txBody>
+          <a:bodyPr wrap="none" lIns="0" rIns="0" tIns="0" bIns="0">
+            <a:noAutofit/>
+          </a:bodyPr>
+          <a:lstStyle/>
+          <a:p>
+            <a:pPr algn="l">
+              <a:lnSpc>
+                <a:spcPts val="1188"/>
+              </a:lnSpc>
+              <a:spcBef>
+                <a:spcPts val="0"/>
+              </a:spcBef>
+              <a:spcAft>
+                <a:spcPts val="0"/>
+              </a:spcAft>
+            </a:pPr>
+            <a:r>
+              <a:rPr sz="1080" b="0" i="0">
+                <a:solidFill>
+                  <a:srgbClr val="243343"/>
+                </a:solidFill>
+                <a:latin typeface="Arial"/>
+              </a:rPr>
+              <a:t>Longitudinal symmetry plane</a:t>
+            </a:r>
+          </a:p>
+        </p:txBody>
+      </p:sp>
       <p:cxnSp>
         <p:nvCxnSpPr>
-          <p:cNvPr id="47" name="Connector 46"/>
+          <p:cNvPr id="49" name="Connector 48"/>
           <p:cNvCxnSpPr/>
           <p:nvPr/>
         </p:nvCxnSpPr>
         <p:spPr>
-          <a:xfrm flipV="1">
-            <a:off x="2039999" y="766800"/>
-            <a:ext cx="0" cy="194400"/>
+          <a:xfrm>
+            <a:off x="3975100" y="558800"/>
+            <a:ext cx="0" cy="1993900"/>
           </a:xfrm>
           <a:prstGeom prst="line">
             <a:avLst/>
           </a:prstGeom>
           <a:ln w="12700">
             <a:solidFill>
-              <a:srgbClr val="1F1F1F"/>
+              <a:srgbClr val="243343"/>
             </a:solidFill>
-            <a:tailEnd type="triangle" w="med" len="med"/>
+            <a:prstDash val="dash"/>
           </a:ln>
         </p:spPr>
         <p:style>
@@ -4743,150 +4976,96 @@
           </a:fontRef>
         </p:style>
       </p:cxnSp>
-      <p:cxnSp>
-        <p:nvCxnSpPr>
-          <p:cNvPr id="48" name="Connector 47"/>
-          <p:cNvCxnSpPr/>
+      <p:sp>
+        <p:nvSpPr>
+          <p:cNvPr id="50" name="TextBox 49"/>
+          <p:cNvSpPr txBox="1"/>
           <p:nvPr/>
-        </p:nvCxnSpPr>
-        <p:spPr>
-          <a:xfrm>
-            <a:off x="2039999" y="1018800"/>
-            <a:ext cx="0" cy="194400"/>
-          </a:xfrm>
-          <a:prstGeom prst="line">
-            <a:avLst/>
-          </a:prstGeom>
-          <a:ln w="12700">
-            <a:solidFill>
-              <a:srgbClr val="1F1F1F"/>
-            </a:solidFill>
-            <a:tailEnd type="triangle" w="med" len="med"/>
-          </a:ln>
-        </p:spPr>
-        <p:style>
-          <a:lnRef idx="2">
-            <a:schemeClr val="accent1"/>
-          </a:lnRef>
-          <a:fillRef idx="0">
-            <a:schemeClr val="accent1"/>
-          </a:fillRef>
-          <a:effectRef idx="1">
-            <a:schemeClr val="accent1"/>
-          </a:effectRef>
-          <a:fontRef idx="minor">
-            <a:schemeClr val="tx1"/>
-          </a:fontRef>
-        </p:style>
-      </p:cxnSp>
-      <p:cxnSp>
-        <p:nvCxnSpPr>
-          <p:cNvPr id="49" name="Connector 48"/>
-          <p:cNvCxnSpPr/>
+        </p:nvSpPr>
+        <p:spPr>
+          <a:xfrm>
+            <a:off x="4000500" y="355600"/>
+            <a:ext cx="1803400" cy="203200"/>
+          </a:xfrm>
+          <a:prstGeom prst="rect">
+            <a:avLst/>
+          </a:prstGeom>
+          <a:noFill/>
+        </p:spPr>
+        <p:txBody>
+          <a:bodyPr wrap="none" lIns="0" rIns="0" tIns="0" bIns="0">
+            <a:noAutofit/>
+          </a:bodyPr>
+          <a:lstStyle/>
+          <a:p>
+            <a:pPr algn="l">
+              <a:lnSpc>
+                <a:spcPts val="1188"/>
+              </a:lnSpc>
+              <a:spcBef>
+                <a:spcPts val="0"/>
+              </a:spcBef>
+              <a:spcAft>
+                <a:spcPts val="0"/>
+              </a:spcAft>
+            </a:pPr>
+            <a:r>
+              <a:rPr sz="1080" b="1" i="0">
+                <a:solidFill>
+                  <a:srgbClr val="243343"/>
+                </a:solidFill>
+                <a:latin typeface="Arial"/>
+              </a:rPr>
+              <a:t>Half-length boundary</a:t>
+            </a:r>
+          </a:p>
+        </p:txBody>
+      </p:sp>
+      <p:sp>
+        <p:nvSpPr>
+          <p:cNvPr id="51" name="TextBox 50"/>
+          <p:cNvSpPr txBox="1"/>
           <p:nvPr/>
-        </p:nvCxnSpPr>
-        <p:spPr>
-          <a:xfrm flipV="1">
-            <a:off x="2423999" y="766800"/>
-            <a:ext cx="0" cy="194400"/>
-          </a:xfrm>
-          <a:prstGeom prst="line">
-            <a:avLst/>
-          </a:prstGeom>
-          <a:ln w="12700">
-            <a:solidFill>
-              <a:srgbClr val="1F1F1F"/>
-            </a:solidFill>
-            <a:tailEnd type="triangle" w="med" len="med"/>
-          </a:ln>
-        </p:spPr>
-        <p:style>
-          <a:lnRef idx="2">
-            <a:schemeClr val="accent1"/>
-          </a:lnRef>
-          <a:fillRef idx="0">
-            <a:schemeClr val="accent1"/>
-          </a:fillRef>
-          <a:effectRef idx="1">
-            <a:schemeClr val="accent1"/>
-          </a:effectRef>
-          <a:fontRef idx="minor">
-            <a:schemeClr val="tx1"/>
-          </a:fontRef>
-        </p:style>
-      </p:cxnSp>
-      <p:cxnSp>
-        <p:nvCxnSpPr>
-          <p:cNvPr id="50" name="Connector 49"/>
-          <p:cNvCxnSpPr/>
-          <p:nvPr/>
-        </p:nvCxnSpPr>
-        <p:spPr>
-          <a:xfrm>
-            <a:off x="2423999" y="1018800"/>
-            <a:ext cx="0" cy="194400"/>
-          </a:xfrm>
-          <a:prstGeom prst="line">
-            <a:avLst/>
-          </a:prstGeom>
-          <a:ln w="12700">
-            <a:solidFill>
-              <a:srgbClr val="1F1F1F"/>
-            </a:solidFill>
-            <a:tailEnd type="triangle" w="med" len="med"/>
-          </a:ln>
-        </p:spPr>
-        <p:style>
-          <a:lnRef idx="2">
-            <a:schemeClr val="accent1"/>
-          </a:lnRef>
-          <a:fillRef idx="0">
-            <a:schemeClr val="accent1"/>
-          </a:fillRef>
-          <a:effectRef idx="1">
-            <a:schemeClr val="accent1"/>
-          </a:effectRef>
-          <a:fontRef idx="minor">
-            <a:schemeClr val="tx1"/>
-          </a:fontRef>
-        </p:style>
-      </p:cxnSp>
-      <p:cxnSp>
-        <p:nvCxnSpPr>
-          <p:cNvPr id="51" name="Connector 50"/>
-          <p:cNvCxnSpPr/>
-          <p:nvPr/>
-        </p:nvCxnSpPr>
-        <p:spPr>
-          <a:xfrm flipV="1">
-            <a:off x="2808000" y="766800"/>
-            <a:ext cx="0" cy="194400"/>
-          </a:xfrm>
-          <a:prstGeom prst="line">
-            <a:avLst/>
-          </a:prstGeom>
-          <a:ln w="12700">
-            <a:solidFill>
-              <a:srgbClr val="1F1F1F"/>
-            </a:solidFill>
-            <a:tailEnd type="triangle" w="med" len="med"/>
-          </a:ln>
-        </p:spPr>
-        <p:style>
-          <a:lnRef idx="2">
-            <a:schemeClr val="accent1"/>
-          </a:lnRef>
-          <a:fillRef idx="0">
-            <a:schemeClr val="accent1"/>
-          </a:fillRef>
-          <a:effectRef idx="1">
-            <a:schemeClr val="accent1"/>
-          </a:effectRef>
-          <a:fontRef idx="minor">
-            <a:schemeClr val="tx1"/>
-          </a:fontRef>
-        </p:style>
-      </p:cxnSp>
+        </p:nvSpPr>
+        <p:spPr>
+          <a:xfrm>
+            <a:off x="4254500" y="2044700"/>
+            <a:ext cx="1511300" cy="177800"/>
+          </a:xfrm>
+          <a:prstGeom prst="rect">
+            <a:avLst/>
+          </a:prstGeom>
+          <a:noFill/>
+        </p:spPr>
+        <p:txBody>
+          <a:bodyPr wrap="none" lIns="0" rIns="0" tIns="0" bIns="0">
+            <a:noAutofit/>
+          </a:bodyPr>
+          <a:lstStyle/>
+          <a:p>
+            <a:pPr algn="l">
+              <a:lnSpc>
+                <a:spcPts val="1188"/>
+              </a:lnSpc>
+              <a:spcBef>
+                <a:spcPts val="0"/>
+              </a:spcBef>
+              <a:spcAft>
+                <a:spcPts val="0"/>
+              </a:spcAft>
+            </a:pPr>
+            <a:r>
+              <a:rPr sz="1080" b="0" i="0">
+                <a:solidFill>
+                  <a:srgbClr val="243343"/>
+                </a:solidFill>
+                <a:latin typeface="Arial"/>
+              </a:rPr>
+              <a:t>Radial motion allowed</a:t>
+            </a:r>
+          </a:p>
+        </p:txBody>
+      </p:sp>
       <p:cxnSp>
         <p:nvCxnSpPr>
           <p:cNvPr id="52" name="Connector 51"/>
@@ -4895,17 +5074,17 @@
         </p:nvCxnSpPr>
         <p:spPr>
           <a:xfrm>
-            <a:off x="2808000" y="1018800"/>
-            <a:ext cx="0" cy="194400"/>
+            <a:off x="4152900" y="2171700"/>
+            <a:ext cx="0" cy="241300"/>
           </a:xfrm>
           <a:prstGeom prst="line">
             <a:avLst/>
           </a:prstGeom>
           <a:ln w="12700">
             <a:solidFill>
-              <a:srgbClr val="1F1F1F"/>
+              <a:srgbClr val="243343"/>
             </a:solidFill>
-            <a:tailEnd type="triangle" w="med" len="med"/>
+            <a:tailEnd type="triangle" w="sm" len="sm"/>
           </a:ln>
         </p:spPr>
         <p:style>
@@ -4931,17 +5110,17 @@
         </p:nvCxnSpPr>
         <p:spPr>
           <a:xfrm flipV="1">
-            <a:off x="3192000" y="766800"/>
-            <a:ext cx="0" cy="194400"/>
+            <a:off x="4152900" y="1917700"/>
+            <a:ext cx="0" cy="254000"/>
           </a:xfrm>
           <a:prstGeom prst="line">
             <a:avLst/>
           </a:prstGeom>
           <a:ln w="12700">
             <a:solidFill>
-              <a:srgbClr val="1F1F1F"/>
+              <a:srgbClr val="243343"/>
             </a:solidFill>
-            <a:tailEnd type="triangle" w="med" len="med"/>
+            <a:tailEnd type="triangle" w="sm" len="sm"/>
           </a:ln>
         </p:spPr>
         <p:style>
@@ -4959,232 +5138,16 @@
           </a:fontRef>
         </p:style>
       </p:cxnSp>
-      <p:cxnSp>
-        <p:nvCxnSpPr>
-          <p:cNvPr id="54" name="Connector 53"/>
-          <p:cNvCxnSpPr/>
-          <p:nvPr/>
-        </p:nvCxnSpPr>
-        <p:spPr>
-          <a:xfrm>
-            <a:off x="3192000" y="1018800"/>
-            <a:ext cx="0" cy="194400"/>
-          </a:xfrm>
-          <a:prstGeom prst="line">
-            <a:avLst/>
-          </a:prstGeom>
-          <a:ln w="12700">
-            <a:solidFill>
-              <a:srgbClr val="1F1F1F"/>
-            </a:solidFill>
-            <a:tailEnd type="triangle" w="med" len="med"/>
-          </a:ln>
-        </p:spPr>
-        <p:style>
-          <a:lnRef idx="2">
-            <a:schemeClr val="accent1"/>
-          </a:lnRef>
-          <a:fillRef idx="0">
-            <a:schemeClr val="accent1"/>
-          </a:fillRef>
-          <a:effectRef idx="1">
-            <a:schemeClr val="accent1"/>
-          </a:effectRef>
-          <a:fontRef idx="minor">
-            <a:schemeClr val="tx1"/>
-          </a:fontRef>
-        </p:style>
-      </p:cxnSp>
-      <p:cxnSp>
-        <p:nvCxnSpPr>
-          <p:cNvPr id="55" name="Connector 54"/>
-          <p:cNvCxnSpPr/>
-          <p:nvPr/>
-        </p:nvCxnSpPr>
-        <p:spPr>
-          <a:xfrm flipV="1">
-            <a:off x="3576000" y="766800"/>
-            <a:ext cx="0" cy="194400"/>
-          </a:xfrm>
-          <a:prstGeom prst="line">
-            <a:avLst/>
-          </a:prstGeom>
-          <a:ln w="12700">
-            <a:solidFill>
-              <a:srgbClr val="1F1F1F"/>
-            </a:solidFill>
-            <a:tailEnd type="triangle" w="med" len="med"/>
-          </a:ln>
-        </p:spPr>
-        <p:style>
-          <a:lnRef idx="2">
-            <a:schemeClr val="accent1"/>
-          </a:lnRef>
-          <a:fillRef idx="0">
-            <a:schemeClr val="accent1"/>
-          </a:fillRef>
-          <a:effectRef idx="1">
-            <a:schemeClr val="accent1"/>
-          </a:effectRef>
-          <a:fontRef idx="minor">
-            <a:schemeClr val="tx1"/>
-          </a:fontRef>
-        </p:style>
-      </p:cxnSp>
-      <p:cxnSp>
-        <p:nvCxnSpPr>
-          <p:cNvPr id="56" name="Connector 55"/>
-          <p:cNvCxnSpPr/>
-          <p:nvPr/>
-        </p:nvCxnSpPr>
-        <p:spPr>
-          <a:xfrm>
-            <a:off x="3576000" y="1018800"/>
-            <a:ext cx="0" cy="194400"/>
-          </a:xfrm>
-          <a:prstGeom prst="line">
-            <a:avLst/>
-          </a:prstGeom>
-          <a:ln w="12700">
-            <a:solidFill>
-              <a:srgbClr val="1F1F1F"/>
-            </a:solidFill>
-            <a:tailEnd type="triangle" w="med" len="med"/>
-          </a:ln>
-        </p:spPr>
-        <p:style>
-          <a:lnRef idx="2">
-            <a:schemeClr val="accent1"/>
-          </a:lnRef>
-          <a:fillRef idx="0">
-            <a:schemeClr val="accent1"/>
-          </a:fillRef>
-          <a:effectRef idx="1">
-            <a:schemeClr val="accent1"/>
-          </a:effectRef>
-          <a:fontRef idx="minor">
-            <a:schemeClr val="tx1"/>
-          </a:fontRef>
-        </p:style>
-      </p:cxnSp>
-      <p:cxnSp>
-        <p:nvCxnSpPr>
-          <p:cNvPr id="57" name="Connector 56"/>
-          <p:cNvCxnSpPr/>
-          <p:nvPr/>
-        </p:nvCxnSpPr>
-        <p:spPr>
-          <a:xfrm flipV="1">
-            <a:off x="3960000" y="766800"/>
-            <a:ext cx="0" cy="194400"/>
-          </a:xfrm>
-          <a:prstGeom prst="line">
-            <a:avLst/>
-          </a:prstGeom>
-          <a:ln w="12700">
-            <a:solidFill>
-              <a:srgbClr val="1F1F1F"/>
-            </a:solidFill>
-            <a:tailEnd type="triangle" w="med" len="med"/>
-          </a:ln>
-        </p:spPr>
-        <p:style>
-          <a:lnRef idx="2">
-            <a:schemeClr val="accent1"/>
-          </a:lnRef>
-          <a:fillRef idx="0">
-            <a:schemeClr val="accent1"/>
-          </a:fillRef>
-          <a:effectRef idx="1">
-            <a:schemeClr val="accent1"/>
-          </a:effectRef>
-          <a:fontRef idx="minor">
-            <a:schemeClr val="tx1"/>
-          </a:fontRef>
-        </p:style>
-      </p:cxnSp>
-      <p:cxnSp>
-        <p:nvCxnSpPr>
-          <p:cNvPr id="58" name="Connector 57"/>
-          <p:cNvCxnSpPr/>
-          <p:nvPr/>
-        </p:nvCxnSpPr>
-        <p:spPr>
-          <a:xfrm>
-            <a:off x="3960000" y="1018800"/>
-            <a:ext cx="0" cy="194400"/>
-          </a:xfrm>
-          <a:prstGeom prst="line">
-            <a:avLst/>
-          </a:prstGeom>
-          <a:ln w="12700">
-            <a:solidFill>
-              <a:srgbClr val="1F1F1F"/>
-            </a:solidFill>
-            <a:tailEnd type="triangle" w="med" len="med"/>
-          </a:ln>
-        </p:spPr>
-        <p:style>
-          <a:lnRef idx="2">
-            <a:schemeClr val="accent1"/>
-          </a:lnRef>
-          <a:fillRef idx="0">
-            <a:schemeClr val="accent1"/>
-          </a:fillRef>
-          <a:effectRef idx="1">
-            <a:schemeClr val="accent1"/>
-          </a:effectRef>
-          <a:fontRef idx="minor">
-            <a:schemeClr val="tx1"/>
-          </a:fontRef>
-        </p:style>
-      </p:cxnSp>
-      <p:cxnSp>
-        <p:nvCxnSpPr>
-          <p:cNvPr id="59" name="Connector 58"/>
-          <p:cNvCxnSpPr/>
-          <p:nvPr/>
-        </p:nvCxnSpPr>
-        <p:spPr>
-          <a:xfrm>
-            <a:off x="4590000" y="990000"/>
-            <a:ext cx="540000" cy="0"/>
-          </a:xfrm>
-          <a:prstGeom prst="line">
-            <a:avLst/>
-          </a:prstGeom>
-          <a:ln w="12700">
-            <a:solidFill>
-              <a:srgbClr val="1F1F1F"/>
-            </a:solidFill>
-            <a:tailEnd type="triangle" w="med" len="med"/>
-          </a:ln>
-        </p:spPr>
-        <p:style>
-          <a:lnRef idx="2">
-            <a:schemeClr val="accent1"/>
-          </a:lnRef>
-          <a:fillRef idx="0">
-            <a:schemeClr val="accent1"/>
-          </a:fillRef>
-          <a:effectRef idx="1">
-            <a:schemeClr val="accent1"/>
-          </a:effectRef>
-          <a:fontRef idx="minor">
-            <a:schemeClr val="tx1"/>
-          </a:fontRef>
-        </p:style>
-      </p:cxnSp>
-      <p:sp>
-        <p:nvSpPr>
-          <p:cNvPr id="60" name="TextBox 59"/>
+      <p:sp>
+        <p:nvSpPr>
+          <p:cNvPr id="54" name="TextBox 53"/>
           <p:cNvSpPr txBox="1"/>
           <p:nvPr/>
         </p:nvSpPr>
         <p:spPr>
           <a:xfrm>
-            <a:off x="4662000" y="730800"/>
-            <a:ext cx="936000" cy="270000"/>
+            <a:off x="4254500" y="2514600"/>
+            <a:ext cx="1511300" cy="393700"/>
           </a:xfrm>
           <a:prstGeom prst="rect">
             <a:avLst/>
@@ -5192,1587 +5155,52 @@
           <a:noFill/>
         </p:spPr>
         <p:txBody>
-          <a:bodyPr wrap="square" lIns="10800" rIns="10800" tIns="3600" bIns="3600">
-            <a:spAutoFit/>
+          <a:bodyPr wrap="none" lIns="0" rIns="0" tIns="0" bIns="0">
+            <a:noAutofit/>
           </a:bodyPr>
           <a:lstStyle/>
           <a:p>
-            <a:pPr algn="ctr"/>
-            <a:r>
-              <a:rPr sz="1000" b="0">
+            <a:pPr algn="l">
+              <a:lnSpc>
+                <a:spcPts val="1188"/>
+              </a:lnSpc>
+              <a:spcBef>
+                <a:spcPts val="0"/>
+              </a:spcBef>
+              <a:spcAft>
+                <a:spcPts val="0"/>
+              </a:spcAft>
+            </a:pPr>
+            <a:r>
+              <a:rPr sz="1080" b="0" i="0">
                 <a:solidFill>
-                  <a:srgbClr val="1F1F1F"/>
+                  <a:srgbClr val="243343"/>
                 </a:solidFill>
                 <a:latin typeface="Arial"/>
               </a:rPr>
-              <a:t>axial force F</a:t>
-            </a:r>
-          </a:p>
-          <a:p>
-            <a:pPr algn="ctr"/>
-            <a:r>
-              <a:rPr sz="1000" b="0">
+              <a:t>Axial: fixed, or</a:t>
+            </a:r>
+          </a:p>
+          <a:p>
+            <a:pPr algn="l">
+              <a:lnSpc>
+                <a:spcPts val="1188"/>
+              </a:lnSpc>
+              <a:spcBef>
+                <a:spcPts val="0"/>
+              </a:spcBef>
+              <a:spcAft>
+                <a:spcPts val="0"/>
+              </a:spcAft>
+            </a:pPr>
+            <a:r>
+              <a:rPr sz="1080" b="0" i="0">
                 <a:solidFill>
-                  <a:srgbClr val="1F1F1F"/>
+                  <a:srgbClr val="243343"/>
                 </a:solidFill>
                 <a:latin typeface="Arial"/>
               </a:rPr>
-              <a:t>(ends fixed)</a:t>
-            </a:r>
-          </a:p>
-        </p:txBody>
-      </p:sp>
-      <p:cxnSp>
-        <p:nvCxnSpPr>
-          <p:cNvPr id="61" name="Connector 60"/>
-          <p:cNvCxnSpPr/>
-          <p:nvPr/>
-        </p:nvCxnSpPr>
-        <p:spPr>
-          <a:xfrm>
-            <a:off x="486000" y="990000"/>
-            <a:ext cx="540000" cy="0"/>
-          </a:xfrm>
-          <a:prstGeom prst="line">
-            <a:avLst/>
-          </a:prstGeom>
-          <a:ln w="12700">
-            <a:solidFill>
-              <a:srgbClr val="1F1F1F"/>
-            </a:solidFill>
-            <a:tailEnd type="triangle" w="med" len="med"/>
-          </a:ln>
-        </p:spPr>
-        <p:style>
-          <a:lnRef idx="2">
-            <a:schemeClr val="accent1"/>
-          </a:lnRef>
-          <a:fillRef idx="0">
-            <a:schemeClr val="accent1"/>
-          </a:fillRef>
-          <a:effectRef idx="1">
-            <a:schemeClr val="accent1"/>
-          </a:effectRef>
-          <a:fontRef idx="minor">
-            <a:schemeClr val="tx1"/>
-          </a:fontRef>
-        </p:style>
-      </p:cxnSp>
-      <p:sp>
-        <p:nvSpPr>
-          <p:cNvPr id="62" name="TextBox 61"/>
-          <p:cNvSpPr txBox="1"/>
-          <p:nvPr/>
-        </p:nvSpPr>
-        <p:spPr>
-          <a:xfrm>
-            <a:off x="216000" y="730800"/>
-            <a:ext cx="756000" cy="270000"/>
-          </a:xfrm>
-          <a:prstGeom prst="rect">
-            <a:avLst/>
-          </a:prstGeom>
-          <a:noFill/>
-        </p:spPr>
-        <p:txBody>
-          <a:bodyPr wrap="square" lIns="10800" rIns="10800" tIns="3600" bIns="3600">
-            <a:spAutoFit/>
-          </a:bodyPr>
-          <a:lstStyle/>
-          <a:p>
-            <a:pPr algn="ctr"/>
-            <a:r>
-              <a:rPr sz="1000" b="0">
-                <a:solidFill>
-                  <a:srgbClr val="1F1F1F"/>
-                </a:solidFill>
-                <a:latin typeface="Arial"/>
-              </a:rPr>
-              <a:t>reaction R</a:t>
-            </a:r>
-          </a:p>
-        </p:txBody>
-      </p:sp>
-      <p:cxnSp>
-        <p:nvCxnSpPr>
-          <p:cNvPr id="63" name="Connector 62"/>
-          <p:cNvCxnSpPr/>
-          <p:nvPr/>
-        </p:nvCxnSpPr>
-        <p:spPr>
-          <a:xfrm>
-            <a:off x="2592000" y="741239"/>
-            <a:ext cx="0" cy="144000"/>
-          </a:xfrm>
-          <a:prstGeom prst="line">
-            <a:avLst/>
-          </a:prstGeom>
-          <a:ln w="12700">
-            <a:solidFill>
-              <a:srgbClr val="1F1F1F"/>
-            </a:solidFill>
-            <a:headEnd type="triangle" w="med" len="med"/>
-            <a:tailEnd type="triangle" w="med" len="med"/>
-          </a:ln>
-        </p:spPr>
-        <p:style>
-          <a:lnRef idx="2">
-            <a:schemeClr val="accent1"/>
-          </a:lnRef>
-          <a:fillRef idx="0">
-            <a:schemeClr val="accent1"/>
-          </a:fillRef>
-          <a:effectRef idx="1">
-            <a:schemeClr val="accent1"/>
-          </a:effectRef>
-          <a:fontRef idx="minor">
-            <a:schemeClr val="tx1"/>
-          </a:fontRef>
-        </p:style>
-      </p:cxnSp>
-      <p:cxnSp>
-        <p:nvCxnSpPr>
-          <p:cNvPr id="64" name="Connector 63"/>
-          <p:cNvCxnSpPr/>
-          <p:nvPr/>
-        </p:nvCxnSpPr>
-        <p:spPr>
-          <a:xfrm flipV="1">
-            <a:off x="3204000" y="1094760"/>
-            <a:ext cx="0" cy="144000"/>
-          </a:xfrm>
-          <a:prstGeom prst="line">
-            <a:avLst/>
-          </a:prstGeom>
-          <a:ln w="12700">
-            <a:solidFill>
-              <a:srgbClr val="1F1F1F"/>
-            </a:solidFill>
-            <a:headEnd type="triangle" w="med" len="med"/>
-            <a:tailEnd type="triangle" w="med" len="med"/>
-          </a:ln>
-        </p:spPr>
-        <p:style>
-          <a:lnRef idx="2">
-            <a:schemeClr val="accent1"/>
-          </a:lnRef>
-          <a:fillRef idx="0">
-            <a:schemeClr val="accent1"/>
-          </a:fillRef>
-          <a:effectRef idx="1">
-            <a:schemeClr val="accent1"/>
-          </a:effectRef>
-          <a:fontRef idx="minor">
-            <a:schemeClr val="tx1"/>
-          </a:fontRef>
-        </p:style>
-      </p:cxnSp>
-      <p:cxnSp>
-        <p:nvCxnSpPr>
-          <p:cNvPr id="65" name="Connector 64"/>
-          <p:cNvCxnSpPr/>
-          <p:nvPr/>
-        </p:nvCxnSpPr>
-        <p:spPr>
-          <a:xfrm>
-            <a:off x="468000" y="990000"/>
-            <a:ext cx="4896000" cy="0"/>
-          </a:xfrm>
-          <a:prstGeom prst="line">
-            <a:avLst/>
-          </a:prstGeom>
-          <a:ln w="12700">
-            <a:solidFill>
-              <a:srgbClr val="1F1F1F"/>
-            </a:solidFill>
-            <a:prstDash val="sysDot"/>
-          </a:ln>
-        </p:spPr>
-        <p:style>
-          <a:lnRef idx="2">
-            <a:schemeClr val="accent1"/>
-          </a:lnRef>
-          <a:fillRef idx="0">
-            <a:schemeClr val="accent1"/>
-          </a:fillRef>
-          <a:effectRef idx="1">
-            <a:schemeClr val="accent1"/>
-          </a:effectRef>
-          <a:fontRef idx="minor">
-            <a:schemeClr val="tx1"/>
-          </a:fontRef>
-        </p:style>
-      </p:cxnSp>
-      <p:sp>
-        <p:nvSpPr>
-          <p:cNvPr id="66" name="TextBox 65"/>
-          <p:cNvSpPr txBox="1"/>
-          <p:nvPr/>
-        </p:nvSpPr>
-        <p:spPr>
-          <a:xfrm>
-            <a:off x="4536000" y="1033200"/>
-            <a:ext cx="864000" cy="270000"/>
-          </a:xfrm>
-          <a:prstGeom prst="rect">
-            <a:avLst/>
-          </a:prstGeom>
-          <a:noFill/>
-        </p:spPr>
-        <p:txBody>
-          <a:bodyPr wrap="square" lIns="10800" rIns="10800" tIns="3600" bIns="3600">
-            <a:spAutoFit/>
-          </a:bodyPr>
-          <a:lstStyle/>
-          <a:p>
-            <a:pPr algn="ctr"/>
-            <a:r>
-              <a:rPr sz="1000" b="0">
-                <a:solidFill>
-                  <a:srgbClr val="1F1F1F"/>
-                </a:solidFill>
-                <a:latin typeface="Arial"/>
-              </a:rPr>
-              <a:t>symmetry axis</a:t>
-            </a:r>
-          </a:p>
-        </p:txBody>
-      </p:sp>
-      <p:cxnSp>
-        <p:nvCxnSpPr>
-          <p:cNvPr id="67" name="Connector 66"/>
-          <p:cNvCxnSpPr/>
-          <p:nvPr/>
-        </p:nvCxnSpPr>
-        <p:spPr>
-          <a:xfrm flipH="1" flipV="1">
-            <a:off x="1296000" y="270000"/>
-            <a:ext cx="648000" cy="378000"/>
-          </a:xfrm>
-          <a:prstGeom prst="line">
-            <a:avLst/>
-          </a:prstGeom>
-          <a:ln w="9525">
-            <a:solidFill>
-              <a:srgbClr val="1F1F1F"/>
-            </a:solidFill>
-          </a:ln>
-        </p:spPr>
-        <p:style>
-          <a:lnRef idx="2">
-            <a:schemeClr val="accent1"/>
-          </a:lnRef>
-          <a:fillRef idx="0">
-            <a:schemeClr val="accent1"/>
-          </a:fillRef>
-          <a:effectRef idx="1">
-            <a:schemeClr val="accent1"/>
-          </a:effectRef>
-          <a:fontRef idx="minor">
-            <a:schemeClr val="tx1"/>
-          </a:fontRef>
-        </p:style>
-      </p:cxnSp>
-      <p:sp>
-        <p:nvSpPr>
-          <p:cNvPr id="68" name="TextBox 67"/>
-          <p:cNvSpPr txBox="1"/>
-          <p:nvPr/>
-        </p:nvSpPr>
-        <p:spPr>
-          <a:xfrm>
-            <a:off x="1296000" y="133200"/>
-            <a:ext cx="1440000" cy="270000"/>
-          </a:xfrm>
-          <a:prstGeom prst="rect">
-            <a:avLst/>
-          </a:prstGeom>
-          <a:noFill/>
-        </p:spPr>
-        <p:txBody>
-          <a:bodyPr wrap="square" lIns="10800" rIns="10800" tIns="3600" bIns="3600">
-            <a:spAutoFit/>
-          </a:bodyPr>
-          <a:lstStyle/>
-          <a:p>
-            <a:pPr algn="r"/>
-            <a:r>
-              <a:rPr sz="1000" b="0">
-                <a:solidFill>
-                  <a:srgbClr val="1F1F1F"/>
-                </a:solidFill>
-                <a:latin typeface="Arial"/>
-              </a:rPr>
-              <a:t>braided aramid sleeve</a:t>
-            </a:r>
-          </a:p>
-          <a:p>
-            <a:pPr algn="r"/>
-            <a:r>
-              <a:rPr sz="1000" b="0">
-                <a:solidFill>
-                  <a:srgbClr val="1F1F1F"/>
-                </a:solidFill>
-                <a:latin typeface="Arial"/>
-              </a:rPr>
-              <a:t>(two handed weaves)</a:t>
-            </a:r>
-          </a:p>
-        </p:txBody>
-      </p:sp>
-      <p:cxnSp>
-        <p:nvCxnSpPr>
-          <p:cNvPr id="69" name="Connector 68"/>
-          <p:cNvCxnSpPr/>
-          <p:nvPr/>
-        </p:nvCxnSpPr>
-        <p:spPr>
-          <a:xfrm flipV="1">
-            <a:off x="3816000" y="270000"/>
-            <a:ext cx="288000" cy="819000"/>
-          </a:xfrm>
-          <a:prstGeom prst="line">
-            <a:avLst/>
-          </a:prstGeom>
-          <a:ln w="9525">
-            <a:solidFill>
-              <a:srgbClr val="1F1F1F"/>
-            </a:solidFill>
-          </a:ln>
-        </p:spPr>
-        <p:style>
-          <a:lnRef idx="2">
-            <a:schemeClr val="accent1"/>
-          </a:lnRef>
-          <a:fillRef idx="0">
-            <a:schemeClr val="accent1"/>
-          </a:fillRef>
-          <a:effectRef idx="1">
-            <a:schemeClr val="accent1"/>
-          </a:effectRef>
-          <a:fontRef idx="minor">
-            <a:schemeClr val="tx1"/>
-          </a:fontRef>
-        </p:style>
-      </p:cxnSp>
-      <p:sp>
-        <p:nvSpPr>
-          <p:cNvPr id="70" name="TextBox 69"/>
-          <p:cNvSpPr txBox="1"/>
-          <p:nvPr/>
-        </p:nvSpPr>
-        <p:spPr>
-          <a:xfrm>
-            <a:off x="2664000" y="133200"/>
-            <a:ext cx="1440000" cy="270000"/>
-          </a:xfrm>
-          <a:prstGeom prst="rect">
-            <a:avLst/>
-          </a:prstGeom>
-          <a:noFill/>
-        </p:spPr>
-        <p:txBody>
-          <a:bodyPr wrap="square" lIns="10800" rIns="10800" tIns="3600" bIns="3600">
-            <a:spAutoFit/>
-          </a:bodyPr>
-          <a:lstStyle/>
-          <a:p>
-            <a:pPr algn="l"/>
-            <a:r>
-              <a:rPr sz="1000" b="0">
-                <a:solidFill>
-                  <a:srgbClr val="1F1F1F"/>
-                </a:solidFill>
-                <a:latin typeface="Arial"/>
-              </a:rPr>
-              <a:t>elastomer bladder</a:t>
-            </a:r>
-          </a:p>
-        </p:txBody>
-      </p:sp>
-      <p:cxnSp>
-        <p:nvCxnSpPr>
-          <p:cNvPr id="71" name="Connector 70"/>
-          <p:cNvCxnSpPr/>
-          <p:nvPr/>
-        </p:nvCxnSpPr>
-        <p:spPr>
-          <a:xfrm flipH="1">
-            <a:off x="432000" y="1404000"/>
-            <a:ext cx="648000" cy="54000"/>
-          </a:xfrm>
-          <a:prstGeom prst="line">
-            <a:avLst/>
-          </a:prstGeom>
-          <a:ln w="9525">
-            <a:solidFill>
-              <a:srgbClr val="1F1F1F"/>
-            </a:solidFill>
-          </a:ln>
-        </p:spPr>
-        <p:style>
-          <a:lnRef idx="2">
-            <a:schemeClr val="accent1"/>
-          </a:lnRef>
-          <a:fillRef idx="0">
-            <a:schemeClr val="accent1"/>
-          </a:fillRef>
-          <a:effectRef idx="1">
-            <a:schemeClr val="accent1"/>
-          </a:effectRef>
-          <a:fontRef idx="minor">
-            <a:schemeClr val="tx1"/>
-          </a:fontRef>
-        </p:style>
-      </p:cxnSp>
-      <p:sp>
-        <p:nvSpPr>
-          <p:cNvPr id="72" name="TextBox 71"/>
-          <p:cNvSpPr txBox="1"/>
-          <p:nvPr/>
-        </p:nvSpPr>
-        <p:spPr>
-          <a:xfrm>
-            <a:off x="432000" y="1321200"/>
-            <a:ext cx="1440000" cy="270000"/>
-          </a:xfrm>
-          <a:prstGeom prst="rect">
-            <a:avLst/>
-          </a:prstGeom>
-          <a:noFill/>
-        </p:spPr>
-        <p:txBody>
-          <a:bodyPr wrap="square" lIns="10800" rIns="10800" tIns="3600" bIns="3600">
-            <a:spAutoFit/>
-          </a:bodyPr>
-          <a:lstStyle/>
-          <a:p>
-            <a:pPr algn="r"/>
-            <a:r>
-              <a:rPr sz="1000" b="0">
-                <a:solidFill>
-                  <a:srgbClr val="1F1F1F"/>
-                </a:solidFill>
-                <a:latin typeface="Arial"/>
-              </a:rPr>
-              <a:t>end cap, clamped</a:t>
-            </a:r>
-          </a:p>
-          <a:p>
-            <a:pPr algn="r"/>
-            <a:r>
-              <a:rPr sz="1000" b="0">
-                <a:solidFill>
-                  <a:srgbClr val="1F1F1F"/>
-                </a:solidFill>
-                <a:latin typeface="Arial"/>
-              </a:rPr>
-              <a:t>(Onyx or aluminum)</a:t>
-            </a:r>
-          </a:p>
-        </p:txBody>
-      </p:sp>
-      <p:cxnSp>
-        <p:nvCxnSpPr>
-          <p:cNvPr id="73" name="Connector 72"/>
-          <p:cNvCxnSpPr/>
-          <p:nvPr/>
-        </p:nvCxnSpPr>
-        <p:spPr>
-          <a:xfrm flipH="1">
-            <a:off x="1764000" y="723240"/>
-            <a:ext cx="828000" cy="734760"/>
-          </a:xfrm>
-          <a:prstGeom prst="line">
-            <a:avLst/>
-          </a:prstGeom>
-          <a:ln w="9525">
-            <a:solidFill>
-              <a:srgbClr val="1F1F1F"/>
-            </a:solidFill>
-          </a:ln>
-        </p:spPr>
-        <p:style>
-          <a:lnRef idx="2">
-            <a:schemeClr val="accent1"/>
-          </a:lnRef>
-          <a:fillRef idx="0">
-            <a:schemeClr val="accent1"/>
-          </a:fillRef>
-          <a:effectRef idx="1">
-            <a:schemeClr val="accent1"/>
-          </a:effectRef>
-          <a:fontRef idx="minor">
-            <a:schemeClr val="tx1"/>
-          </a:fontRef>
-        </p:style>
-      </p:cxnSp>
-      <p:sp>
-        <p:nvSpPr>
-          <p:cNvPr id="74" name="TextBox 73"/>
-          <p:cNvSpPr txBox="1"/>
-          <p:nvPr/>
-        </p:nvSpPr>
-        <p:spPr>
-          <a:xfrm>
-            <a:off x="1764000" y="1321200"/>
-            <a:ext cx="1440000" cy="270000"/>
-          </a:xfrm>
-          <a:prstGeom prst="rect">
-            <a:avLst/>
-          </a:prstGeom>
-          <a:noFill/>
-        </p:spPr>
-        <p:txBody>
-          <a:bodyPr wrap="square" lIns="10800" rIns="10800" tIns="3600" bIns="3600">
-            <a:spAutoFit/>
-          </a:bodyPr>
-          <a:lstStyle/>
-          <a:p>
-            <a:pPr algn="r"/>
-            <a:r>
-              <a:rPr sz="1000" b="0">
-                <a:solidFill>
-                  <a:srgbClr val="1F1F1F"/>
-                </a:solidFill>
-                <a:latin typeface="Arial"/>
-              </a:rPr>
-              <a:t>layer contact pairs</a:t>
-            </a:r>
-          </a:p>
-          <a:p>
-            <a:pPr algn="r"/>
-            <a:r>
-              <a:rPr sz="1000" b="0">
-                <a:solidFill>
-                  <a:srgbClr val="1F1F1F"/>
-                </a:solidFill>
-                <a:latin typeface="Arial"/>
-              </a:rPr>
-              <a:t>(braid--bladder, braid--cap)</a:t>
-            </a:r>
-          </a:p>
-        </p:txBody>
-      </p:sp>
-      <p:sp>
-        <p:nvSpPr>
-          <p:cNvPr id="75" name="TextBox 74"/>
-          <p:cNvSpPr txBox="1"/>
-          <p:nvPr/>
-        </p:nvSpPr>
-        <p:spPr>
-          <a:xfrm>
-            <a:off x="72000" y="1800000"/>
-            <a:ext cx="5400000" cy="270000"/>
-          </a:xfrm>
-          <a:prstGeom prst="rect">
-            <a:avLst/>
-          </a:prstGeom>
-          <a:noFill/>
-        </p:spPr>
-        <p:txBody>
-          <a:bodyPr wrap="square" lIns="10800" rIns="10800" tIns="3600" bIns="3600">
-            <a:spAutoFit/>
-          </a:bodyPr>
-          <a:lstStyle/>
-          <a:p>
-            <a:pPr algn="ctr"/>
-            <a:r>
-              <a:rPr sz="1000" b="0">
-                <a:solidFill>
-                  <a:srgbClr val="1F1F1F"/>
-                </a:solidFill>
-                <a:latin typeface="Arial"/>
-              </a:rPr>
-              <a:t>Pressure acts inside-out on the bladder; the braided sleeve carries the tension and converts radial expansion to axial contraction.</a:t>
-            </a:r>
-          </a:p>
-        </p:txBody>
-      </p:sp>
-      <p:sp>
-        <p:nvSpPr>
-          <p:cNvPr id="76" name="TextBox 75"/>
-          <p:cNvSpPr txBox="1"/>
-          <p:nvPr/>
-        </p:nvSpPr>
-        <p:spPr>
-          <a:xfrm>
-            <a:off x="72000" y="2070000"/>
-            <a:ext cx="3600000" cy="270000"/>
-          </a:xfrm>
-          <a:prstGeom prst="rect">
-            <a:avLst/>
-          </a:prstGeom>
-          <a:noFill/>
-        </p:spPr>
-        <p:txBody>
-          <a:bodyPr wrap="square" lIns="10800" rIns="10800" tIns="3600" bIns="3600">
-            <a:spAutoFit/>
-          </a:bodyPr>
-          <a:lstStyle/>
-          <a:p>
-            <a:pPr algn="l"/>
-            <a:r>
-              <a:rPr sz="1000" b="1">
-                <a:solidFill>
-                  <a:srgbClr val="1F1F1F"/>
-                </a:solidFill>
-                <a:latin typeface="Arial"/>
-              </a:rPr>
-              <a:t>(B) Exploded view</a:t>
-            </a:r>
-          </a:p>
-        </p:txBody>
-      </p:sp>
-      <p:cxnSp>
-        <p:nvCxnSpPr>
-          <p:cNvPr id="77" name="Connector 76"/>
-          <p:cNvCxnSpPr/>
-          <p:nvPr/>
-        </p:nvCxnSpPr>
-        <p:spPr>
-          <a:xfrm>
-            <a:off x="432000" y="2466000"/>
-            <a:ext cx="5076000" cy="0"/>
-          </a:xfrm>
-          <a:prstGeom prst="line">
-            <a:avLst/>
-          </a:prstGeom>
-          <a:ln w="12700">
-            <a:solidFill>
-              <a:srgbClr val="1F1F1F"/>
-            </a:solidFill>
-            <a:prstDash val="sysDot"/>
-          </a:ln>
-        </p:spPr>
-        <p:style>
-          <a:lnRef idx="2">
-            <a:schemeClr val="accent1"/>
-          </a:lnRef>
-          <a:fillRef idx="0">
-            <a:schemeClr val="accent1"/>
-          </a:fillRef>
-          <a:effectRef idx="1">
-            <a:schemeClr val="accent1"/>
-          </a:effectRef>
-          <a:fontRef idx="minor">
-            <a:schemeClr val="tx1"/>
-          </a:fontRef>
-        </p:style>
-      </p:cxnSp>
-      <p:sp>
-        <p:nvSpPr>
-          <p:cNvPr id="78" name="Rectangle 77"/>
-          <p:cNvSpPr/>
-          <p:nvPr/>
-        </p:nvSpPr>
-        <p:spPr>
-          <a:xfrm>
-            <a:off x="792000" y="2088000"/>
-            <a:ext cx="360000" cy="756000"/>
-          </a:xfrm>
-          <a:prstGeom prst="rect">
-            <a:avLst/>
-          </a:prstGeom>
-          <a:solidFill>
-            <a:srgbClr val="C9C9C9"/>
-          </a:solidFill>
-          <a:ln w="12700">
-            <a:solidFill>
-              <a:srgbClr val="1F1F1F"/>
-            </a:solidFill>
-          </a:ln>
-        </p:spPr>
-        <p:style>
-          <a:lnRef idx="1">
-            <a:schemeClr val="accent1"/>
-          </a:lnRef>
-          <a:fillRef idx="3">
-            <a:schemeClr val="accent1"/>
-          </a:fillRef>
-          <a:effectRef idx="2">
-            <a:schemeClr val="accent1"/>
-          </a:effectRef>
-          <a:fontRef idx="minor">
-            <a:schemeClr val="lt1"/>
-          </a:fontRef>
-        </p:style>
-        <p:txBody>
-          <a:bodyPr rtlCol="0" anchor="ctr"/>
-          <a:lstStyle/>
-          <a:p>
-            <a:pPr algn="ctr"/>
-          </a:p>
-        </p:txBody>
-      </p:sp>
-      <p:sp>
-        <p:nvSpPr>
-          <p:cNvPr id="79" name="Rounded Rectangle 78"/>
-          <p:cNvSpPr/>
-          <p:nvPr/>
-        </p:nvSpPr>
-        <p:spPr>
-          <a:xfrm>
-            <a:off x="1404000" y="2033999"/>
-            <a:ext cx="1655999" cy="864000"/>
-          </a:xfrm>
-          <a:prstGeom prst="roundRect">
-            <a:avLst>
-              <a:gd name="adj" fmla="val 50000"/>
-            </a:avLst>
-          </a:prstGeom>
-          <a:noFill/>
-          <a:ln w="22225">
-            <a:solidFill>
-              <a:srgbClr val="1F1F1F"/>
-            </a:solidFill>
-          </a:ln>
-        </p:spPr>
-        <p:style>
-          <a:lnRef idx="1">
-            <a:schemeClr val="accent1"/>
-          </a:lnRef>
-          <a:fillRef idx="3">
-            <a:schemeClr val="accent1"/>
-          </a:fillRef>
-          <a:effectRef idx="2">
-            <a:schemeClr val="accent1"/>
-          </a:effectRef>
-          <a:fontRef idx="minor">
-            <a:schemeClr val="lt1"/>
-          </a:fontRef>
-        </p:style>
-        <p:txBody>
-          <a:bodyPr rtlCol="0" anchor="ctr"/>
-          <a:lstStyle/>
-          <a:p>
-            <a:pPr algn="ctr"/>
-          </a:p>
-        </p:txBody>
-      </p:sp>
-      <p:cxnSp>
-        <p:nvCxnSpPr>
-          <p:cNvPr id="80" name="Connector 79"/>
-          <p:cNvCxnSpPr/>
-          <p:nvPr/>
-        </p:nvCxnSpPr>
-        <p:spPr>
-          <a:xfrm>
-            <a:off x="1494000" y="2070000"/>
-            <a:ext cx="93600" cy="791999"/>
-          </a:xfrm>
-          <a:prstGeom prst="line">
-            <a:avLst/>
-          </a:prstGeom>
-          <a:ln w="12700">
-            <a:solidFill>
-              <a:srgbClr val="1F1F1F"/>
-            </a:solidFill>
-          </a:ln>
-        </p:spPr>
-        <p:style>
-          <a:lnRef idx="2">
-            <a:schemeClr val="accent1"/>
-          </a:lnRef>
-          <a:fillRef idx="0">
-            <a:schemeClr val="accent1"/>
-          </a:fillRef>
-          <a:effectRef idx="1">
-            <a:schemeClr val="accent1"/>
-          </a:effectRef>
-          <a:fontRef idx="minor">
-            <a:schemeClr val="tx1"/>
-          </a:fontRef>
-        </p:style>
-      </p:cxnSp>
-      <p:cxnSp>
-        <p:nvCxnSpPr>
-          <p:cNvPr id="81" name="Connector 80"/>
-          <p:cNvCxnSpPr/>
-          <p:nvPr/>
-        </p:nvCxnSpPr>
-        <p:spPr>
-          <a:xfrm flipV="1">
-            <a:off x="1494000" y="2070000"/>
-            <a:ext cx="93600" cy="791999"/>
-          </a:xfrm>
-          <a:prstGeom prst="line">
-            <a:avLst/>
-          </a:prstGeom>
-          <a:ln w="12700">
-            <a:solidFill>
-              <a:srgbClr val="1F1F1F"/>
-            </a:solidFill>
-          </a:ln>
-        </p:spPr>
-        <p:style>
-          <a:lnRef idx="2">
-            <a:schemeClr val="accent1"/>
-          </a:lnRef>
-          <a:fillRef idx="0">
-            <a:schemeClr val="accent1"/>
-          </a:fillRef>
-          <a:effectRef idx="1">
-            <a:schemeClr val="accent1"/>
-          </a:effectRef>
-          <a:fontRef idx="minor">
-            <a:schemeClr val="tx1"/>
-          </a:fontRef>
-        </p:style>
-      </p:cxnSp>
-      <p:cxnSp>
-        <p:nvCxnSpPr>
-          <p:cNvPr id="82" name="Connector 81"/>
-          <p:cNvCxnSpPr/>
-          <p:nvPr/>
-        </p:nvCxnSpPr>
-        <p:spPr>
-          <a:xfrm>
-            <a:off x="1681200" y="2070000"/>
-            <a:ext cx="93600" cy="791999"/>
-          </a:xfrm>
-          <a:prstGeom prst="line">
-            <a:avLst/>
-          </a:prstGeom>
-          <a:ln w="12700">
-            <a:solidFill>
-              <a:srgbClr val="1F1F1F"/>
-            </a:solidFill>
-          </a:ln>
-        </p:spPr>
-        <p:style>
-          <a:lnRef idx="2">
-            <a:schemeClr val="accent1"/>
-          </a:lnRef>
-          <a:fillRef idx="0">
-            <a:schemeClr val="accent1"/>
-          </a:fillRef>
-          <a:effectRef idx="1">
-            <a:schemeClr val="accent1"/>
-          </a:effectRef>
-          <a:fontRef idx="minor">
-            <a:schemeClr val="tx1"/>
-          </a:fontRef>
-        </p:style>
-      </p:cxnSp>
-      <p:cxnSp>
-        <p:nvCxnSpPr>
-          <p:cNvPr id="83" name="Connector 82"/>
-          <p:cNvCxnSpPr/>
-          <p:nvPr/>
-        </p:nvCxnSpPr>
-        <p:spPr>
-          <a:xfrm flipV="1">
-            <a:off x="1681200" y="2070000"/>
-            <a:ext cx="93600" cy="791999"/>
-          </a:xfrm>
-          <a:prstGeom prst="line">
-            <a:avLst/>
-          </a:prstGeom>
-          <a:ln w="12700">
-            <a:solidFill>
-              <a:srgbClr val="1F1F1F"/>
-            </a:solidFill>
-          </a:ln>
-        </p:spPr>
-        <p:style>
-          <a:lnRef idx="2">
-            <a:schemeClr val="accent1"/>
-          </a:lnRef>
-          <a:fillRef idx="0">
-            <a:schemeClr val="accent1"/>
-          </a:fillRef>
-          <a:effectRef idx="1">
-            <a:schemeClr val="accent1"/>
-          </a:effectRef>
-          <a:fontRef idx="minor">
-            <a:schemeClr val="tx1"/>
-          </a:fontRef>
-        </p:style>
-      </p:cxnSp>
-      <p:cxnSp>
-        <p:nvCxnSpPr>
-          <p:cNvPr id="84" name="Connector 83"/>
-          <p:cNvCxnSpPr/>
-          <p:nvPr/>
-        </p:nvCxnSpPr>
-        <p:spPr>
-          <a:xfrm>
-            <a:off x="1868400" y="2070000"/>
-            <a:ext cx="93600" cy="791999"/>
-          </a:xfrm>
-          <a:prstGeom prst="line">
-            <a:avLst/>
-          </a:prstGeom>
-          <a:ln w="12700">
-            <a:solidFill>
-              <a:srgbClr val="1F1F1F"/>
-            </a:solidFill>
-          </a:ln>
-        </p:spPr>
-        <p:style>
-          <a:lnRef idx="2">
-            <a:schemeClr val="accent1"/>
-          </a:lnRef>
-          <a:fillRef idx="0">
-            <a:schemeClr val="accent1"/>
-          </a:fillRef>
-          <a:effectRef idx="1">
-            <a:schemeClr val="accent1"/>
-          </a:effectRef>
-          <a:fontRef idx="minor">
-            <a:schemeClr val="tx1"/>
-          </a:fontRef>
-        </p:style>
-      </p:cxnSp>
-      <p:cxnSp>
-        <p:nvCxnSpPr>
-          <p:cNvPr id="85" name="Connector 84"/>
-          <p:cNvCxnSpPr/>
-          <p:nvPr/>
-        </p:nvCxnSpPr>
-        <p:spPr>
-          <a:xfrm flipV="1">
-            <a:off x="1868400" y="2070000"/>
-            <a:ext cx="93600" cy="791999"/>
-          </a:xfrm>
-          <a:prstGeom prst="line">
-            <a:avLst/>
-          </a:prstGeom>
-          <a:ln w="12700">
-            <a:solidFill>
-              <a:srgbClr val="1F1F1F"/>
-            </a:solidFill>
-          </a:ln>
-        </p:spPr>
-        <p:style>
-          <a:lnRef idx="2">
-            <a:schemeClr val="accent1"/>
-          </a:lnRef>
-          <a:fillRef idx="0">
-            <a:schemeClr val="accent1"/>
-          </a:fillRef>
-          <a:effectRef idx="1">
-            <a:schemeClr val="accent1"/>
-          </a:effectRef>
-          <a:fontRef idx="minor">
-            <a:schemeClr val="tx1"/>
-          </a:fontRef>
-        </p:style>
-      </p:cxnSp>
-      <p:cxnSp>
-        <p:nvCxnSpPr>
-          <p:cNvPr id="86" name="Connector 85"/>
-          <p:cNvCxnSpPr/>
-          <p:nvPr/>
-        </p:nvCxnSpPr>
-        <p:spPr>
-          <a:xfrm>
-            <a:off x="2055600" y="2070000"/>
-            <a:ext cx="93600" cy="791999"/>
-          </a:xfrm>
-          <a:prstGeom prst="line">
-            <a:avLst/>
-          </a:prstGeom>
-          <a:ln w="12700">
-            <a:solidFill>
-              <a:srgbClr val="1F1F1F"/>
-            </a:solidFill>
-          </a:ln>
-        </p:spPr>
-        <p:style>
-          <a:lnRef idx="2">
-            <a:schemeClr val="accent1"/>
-          </a:lnRef>
-          <a:fillRef idx="0">
-            <a:schemeClr val="accent1"/>
-          </a:fillRef>
-          <a:effectRef idx="1">
-            <a:schemeClr val="accent1"/>
-          </a:effectRef>
-          <a:fontRef idx="minor">
-            <a:schemeClr val="tx1"/>
-          </a:fontRef>
-        </p:style>
-      </p:cxnSp>
-      <p:cxnSp>
-        <p:nvCxnSpPr>
-          <p:cNvPr id="87" name="Connector 86"/>
-          <p:cNvCxnSpPr/>
-          <p:nvPr/>
-        </p:nvCxnSpPr>
-        <p:spPr>
-          <a:xfrm flipV="1">
-            <a:off x="2055600" y="2070000"/>
-            <a:ext cx="93600" cy="791999"/>
-          </a:xfrm>
-          <a:prstGeom prst="line">
-            <a:avLst/>
-          </a:prstGeom>
-          <a:ln w="12700">
-            <a:solidFill>
-              <a:srgbClr val="1F1F1F"/>
-            </a:solidFill>
-          </a:ln>
-        </p:spPr>
-        <p:style>
-          <a:lnRef idx="2">
-            <a:schemeClr val="accent1"/>
-          </a:lnRef>
-          <a:fillRef idx="0">
-            <a:schemeClr val="accent1"/>
-          </a:fillRef>
-          <a:effectRef idx="1">
-            <a:schemeClr val="accent1"/>
-          </a:effectRef>
-          <a:fontRef idx="minor">
-            <a:schemeClr val="tx1"/>
-          </a:fontRef>
-        </p:style>
-      </p:cxnSp>
-      <p:cxnSp>
-        <p:nvCxnSpPr>
-          <p:cNvPr id="88" name="Connector 87"/>
-          <p:cNvCxnSpPr/>
-          <p:nvPr/>
-        </p:nvCxnSpPr>
-        <p:spPr>
-          <a:xfrm>
-            <a:off x="2242800" y="2070000"/>
-            <a:ext cx="93600" cy="791999"/>
-          </a:xfrm>
-          <a:prstGeom prst="line">
-            <a:avLst/>
-          </a:prstGeom>
-          <a:ln w="12700">
-            <a:solidFill>
-              <a:srgbClr val="1F1F1F"/>
-            </a:solidFill>
-          </a:ln>
-        </p:spPr>
-        <p:style>
-          <a:lnRef idx="2">
-            <a:schemeClr val="accent1"/>
-          </a:lnRef>
-          <a:fillRef idx="0">
-            <a:schemeClr val="accent1"/>
-          </a:fillRef>
-          <a:effectRef idx="1">
-            <a:schemeClr val="accent1"/>
-          </a:effectRef>
-          <a:fontRef idx="minor">
-            <a:schemeClr val="tx1"/>
-          </a:fontRef>
-        </p:style>
-      </p:cxnSp>
-      <p:cxnSp>
-        <p:nvCxnSpPr>
-          <p:cNvPr id="89" name="Connector 88"/>
-          <p:cNvCxnSpPr/>
-          <p:nvPr/>
-        </p:nvCxnSpPr>
-        <p:spPr>
-          <a:xfrm flipV="1">
-            <a:off x="2242800" y="2070000"/>
-            <a:ext cx="93600" cy="791999"/>
-          </a:xfrm>
-          <a:prstGeom prst="line">
-            <a:avLst/>
-          </a:prstGeom>
-          <a:ln w="12700">
-            <a:solidFill>
-              <a:srgbClr val="1F1F1F"/>
-            </a:solidFill>
-          </a:ln>
-        </p:spPr>
-        <p:style>
-          <a:lnRef idx="2">
-            <a:schemeClr val="accent1"/>
-          </a:lnRef>
-          <a:fillRef idx="0">
-            <a:schemeClr val="accent1"/>
-          </a:fillRef>
-          <a:effectRef idx="1">
-            <a:schemeClr val="accent1"/>
-          </a:effectRef>
-          <a:fontRef idx="minor">
-            <a:schemeClr val="tx1"/>
-          </a:fontRef>
-        </p:style>
-      </p:cxnSp>
-      <p:cxnSp>
-        <p:nvCxnSpPr>
-          <p:cNvPr id="90" name="Connector 89"/>
-          <p:cNvCxnSpPr/>
-          <p:nvPr/>
-        </p:nvCxnSpPr>
-        <p:spPr>
-          <a:xfrm>
-            <a:off x="2430000" y="2070000"/>
-            <a:ext cx="93600" cy="791999"/>
-          </a:xfrm>
-          <a:prstGeom prst="line">
-            <a:avLst/>
-          </a:prstGeom>
-          <a:ln w="12700">
-            <a:solidFill>
-              <a:srgbClr val="1F1F1F"/>
-            </a:solidFill>
-          </a:ln>
-        </p:spPr>
-        <p:style>
-          <a:lnRef idx="2">
-            <a:schemeClr val="accent1"/>
-          </a:lnRef>
-          <a:fillRef idx="0">
-            <a:schemeClr val="accent1"/>
-          </a:fillRef>
-          <a:effectRef idx="1">
-            <a:schemeClr val="accent1"/>
-          </a:effectRef>
-          <a:fontRef idx="minor">
-            <a:schemeClr val="tx1"/>
-          </a:fontRef>
-        </p:style>
-      </p:cxnSp>
-      <p:cxnSp>
-        <p:nvCxnSpPr>
-          <p:cNvPr id="91" name="Connector 90"/>
-          <p:cNvCxnSpPr/>
-          <p:nvPr/>
-        </p:nvCxnSpPr>
-        <p:spPr>
-          <a:xfrm flipV="1">
-            <a:off x="2430000" y="2070000"/>
-            <a:ext cx="93600" cy="791999"/>
-          </a:xfrm>
-          <a:prstGeom prst="line">
-            <a:avLst/>
-          </a:prstGeom>
-          <a:ln w="12700">
-            <a:solidFill>
-              <a:srgbClr val="1F1F1F"/>
-            </a:solidFill>
-          </a:ln>
-        </p:spPr>
-        <p:style>
-          <a:lnRef idx="2">
-            <a:schemeClr val="accent1"/>
-          </a:lnRef>
-          <a:fillRef idx="0">
-            <a:schemeClr val="accent1"/>
-          </a:fillRef>
-          <a:effectRef idx="1">
-            <a:schemeClr val="accent1"/>
-          </a:effectRef>
-          <a:fontRef idx="minor">
-            <a:schemeClr val="tx1"/>
-          </a:fontRef>
-        </p:style>
-      </p:cxnSp>
-      <p:cxnSp>
-        <p:nvCxnSpPr>
-          <p:cNvPr id="92" name="Connector 91"/>
-          <p:cNvCxnSpPr/>
-          <p:nvPr/>
-        </p:nvCxnSpPr>
-        <p:spPr>
-          <a:xfrm>
-            <a:off x="2617200" y="2070000"/>
-            <a:ext cx="93600" cy="791999"/>
-          </a:xfrm>
-          <a:prstGeom prst="line">
-            <a:avLst/>
-          </a:prstGeom>
-          <a:ln w="12700">
-            <a:solidFill>
-              <a:srgbClr val="1F1F1F"/>
-            </a:solidFill>
-          </a:ln>
-        </p:spPr>
-        <p:style>
-          <a:lnRef idx="2">
-            <a:schemeClr val="accent1"/>
-          </a:lnRef>
-          <a:fillRef idx="0">
-            <a:schemeClr val="accent1"/>
-          </a:fillRef>
-          <a:effectRef idx="1">
-            <a:schemeClr val="accent1"/>
-          </a:effectRef>
-          <a:fontRef idx="minor">
-            <a:schemeClr val="tx1"/>
-          </a:fontRef>
-        </p:style>
-      </p:cxnSp>
-      <p:cxnSp>
-        <p:nvCxnSpPr>
-          <p:cNvPr id="93" name="Connector 92"/>
-          <p:cNvCxnSpPr/>
-          <p:nvPr/>
-        </p:nvCxnSpPr>
-        <p:spPr>
-          <a:xfrm flipV="1">
-            <a:off x="2617200" y="2070000"/>
-            <a:ext cx="93600" cy="791999"/>
-          </a:xfrm>
-          <a:prstGeom prst="line">
-            <a:avLst/>
-          </a:prstGeom>
-          <a:ln w="12700">
-            <a:solidFill>
-              <a:srgbClr val="1F1F1F"/>
-            </a:solidFill>
-          </a:ln>
-        </p:spPr>
-        <p:style>
-          <a:lnRef idx="2">
-            <a:schemeClr val="accent1"/>
-          </a:lnRef>
-          <a:fillRef idx="0">
-            <a:schemeClr val="accent1"/>
-          </a:fillRef>
-          <a:effectRef idx="1">
-            <a:schemeClr val="accent1"/>
-          </a:effectRef>
-          <a:fontRef idx="minor">
-            <a:schemeClr val="tx1"/>
-          </a:fontRef>
-        </p:style>
-      </p:cxnSp>
-      <p:cxnSp>
-        <p:nvCxnSpPr>
-          <p:cNvPr id="94" name="Connector 93"/>
-          <p:cNvCxnSpPr/>
-          <p:nvPr/>
-        </p:nvCxnSpPr>
-        <p:spPr>
-          <a:xfrm>
-            <a:off x="2804400" y="2070000"/>
-            <a:ext cx="93600" cy="791999"/>
-          </a:xfrm>
-          <a:prstGeom prst="line">
-            <a:avLst/>
-          </a:prstGeom>
-          <a:ln w="12700">
-            <a:solidFill>
-              <a:srgbClr val="1F1F1F"/>
-            </a:solidFill>
-          </a:ln>
-        </p:spPr>
-        <p:style>
-          <a:lnRef idx="2">
-            <a:schemeClr val="accent1"/>
-          </a:lnRef>
-          <a:fillRef idx="0">
-            <a:schemeClr val="accent1"/>
-          </a:fillRef>
-          <a:effectRef idx="1">
-            <a:schemeClr val="accent1"/>
-          </a:effectRef>
-          <a:fontRef idx="minor">
-            <a:schemeClr val="tx1"/>
-          </a:fontRef>
-        </p:style>
-      </p:cxnSp>
-      <p:cxnSp>
-        <p:nvCxnSpPr>
-          <p:cNvPr id="95" name="Connector 94"/>
-          <p:cNvCxnSpPr/>
-          <p:nvPr/>
-        </p:nvCxnSpPr>
-        <p:spPr>
-          <a:xfrm flipV="1">
-            <a:off x="2804400" y="2070000"/>
-            <a:ext cx="93600" cy="791999"/>
-          </a:xfrm>
-          <a:prstGeom prst="line">
-            <a:avLst/>
-          </a:prstGeom>
-          <a:ln w="12700">
-            <a:solidFill>
-              <a:srgbClr val="1F1F1F"/>
-            </a:solidFill>
-          </a:ln>
-        </p:spPr>
-        <p:style>
-          <a:lnRef idx="2">
-            <a:schemeClr val="accent1"/>
-          </a:lnRef>
-          <a:fillRef idx="0">
-            <a:schemeClr val="accent1"/>
-          </a:fillRef>
-          <a:effectRef idx="1">
-            <a:schemeClr val="accent1"/>
-          </a:effectRef>
-          <a:fontRef idx="minor">
-            <a:schemeClr val="tx1"/>
-          </a:fontRef>
-        </p:style>
-      </p:cxnSp>
-      <p:sp>
-        <p:nvSpPr>
-          <p:cNvPr id="96" name="Rounded Rectangle 95"/>
-          <p:cNvSpPr/>
-          <p:nvPr/>
-        </p:nvSpPr>
-        <p:spPr>
-          <a:xfrm>
-            <a:off x="2988000" y="2142000"/>
-            <a:ext cx="1224000" cy="612000"/>
-          </a:xfrm>
-          <a:prstGeom prst="roundRect">
-            <a:avLst>
-              <a:gd name="adj" fmla="val 50000"/>
-            </a:avLst>
-          </a:prstGeom>
-          <a:solidFill>
-            <a:srgbClr val="E3E3E3"/>
-          </a:solidFill>
-          <a:ln w="9525">
-            <a:solidFill>
-              <a:srgbClr val="8A8A8A"/>
-            </a:solidFill>
-          </a:ln>
-        </p:spPr>
-        <p:style>
-          <a:lnRef idx="1">
-            <a:schemeClr val="accent1"/>
-          </a:lnRef>
-          <a:fillRef idx="3">
-            <a:schemeClr val="accent1"/>
-          </a:fillRef>
-          <a:effectRef idx="2">
-            <a:schemeClr val="accent1"/>
-          </a:effectRef>
-          <a:fontRef idx="minor">
-            <a:schemeClr val="lt1"/>
-          </a:fontRef>
-        </p:style>
-        <p:txBody>
-          <a:bodyPr rtlCol="0" anchor="ctr"/>
-          <a:lstStyle/>
-          <a:p>
-            <a:pPr algn="ctr"/>
-          </a:p>
-        </p:txBody>
-      </p:sp>
-      <p:sp>
-        <p:nvSpPr>
-          <p:cNvPr id="97" name="Rectangle 96"/>
-          <p:cNvSpPr/>
-          <p:nvPr/>
-        </p:nvSpPr>
-        <p:spPr>
-          <a:xfrm>
-            <a:off x="4536000" y="2088000"/>
-            <a:ext cx="360000" cy="756000"/>
-          </a:xfrm>
-          <a:prstGeom prst="rect">
-            <a:avLst/>
-          </a:prstGeom>
-          <a:solidFill>
-            <a:srgbClr val="C9C9C9"/>
-          </a:solidFill>
-          <a:ln w="12700">
-            <a:solidFill>
-              <a:srgbClr val="1F1F1F"/>
-            </a:solidFill>
-          </a:ln>
-        </p:spPr>
-        <p:style>
-          <a:lnRef idx="1">
-            <a:schemeClr val="accent1"/>
-          </a:lnRef>
-          <a:fillRef idx="3">
-            <a:schemeClr val="accent1"/>
-          </a:fillRef>
-          <a:effectRef idx="2">
-            <a:schemeClr val="accent1"/>
-          </a:effectRef>
-          <a:fontRef idx="minor">
-            <a:schemeClr val="lt1"/>
-          </a:fontRef>
-        </p:style>
-        <p:txBody>
-          <a:bodyPr rtlCol="0" anchor="ctr"/>
-          <a:lstStyle/>
-          <a:p>
-            <a:pPr algn="ctr"/>
-          </a:p>
-        </p:txBody>
-      </p:sp>
-      <p:sp>
-        <p:nvSpPr>
-          <p:cNvPr id="98" name="TextBox 97"/>
-          <p:cNvSpPr txBox="1"/>
-          <p:nvPr/>
-        </p:nvSpPr>
-        <p:spPr>
-          <a:xfrm>
-            <a:off x="612000" y="2934000"/>
-            <a:ext cx="792000" cy="270000"/>
-          </a:xfrm>
-          <a:prstGeom prst="rect">
-            <a:avLst/>
-          </a:prstGeom>
-          <a:noFill/>
-        </p:spPr>
-        <p:txBody>
-          <a:bodyPr wrap="square" lIns="10800" rIns="10800" tIns="3600" bIns="3600">
-            <a:spAutoFit/>
-          </a:bodyPr>
-          <a:lstStyle/>
-          <a:p>
-            <a:pPr algn="ctr"/>
-            <a:r>
-              <a:rPr sz="1000" b="0">
-                <a:solidFill>
-                  <a:srgbClr val="1F1F1F"/>
-                </a:solidFill>
-                <a:latin typeface="Arial"/>
-              </a:rPr>
-              <a:t>end cap</a:t>
-            </a:r>
-          </a:p>
-        </p:txBody>
-      </p:sp>
-      <p:sp>
-        <p:nvSpPr>
-          <p:cNvPr id="99" name="TextBox 98"/>
-          <p:cNvSpPr txBox="1"/>
-          <p:nvPr/>
-        </p:nvSpPr>
-        <p:spPr>
-          <a:xfrm>
-            <a:off x="1655999" y="1782000"/>
-            <a:ext cx="1152000" cy="270000"/>
-          </a:xfrm>
-          <a:prstGeom prst="rect">
-            <a:avLst/>
-          </a:prstGeom>
-          <a:noFill/>
-        </p:spPr>
-        <p:txBody>
-          <a:bodyPr wrap="square" lIns="10800" rIns="10800" tIns="3600" bIns="3600">
-            <a:spAutoFit/>
-          </a:bodyPr>
-          <a:lstStyle/>
-          <a:p>
-            <a:pPr algn="ctr"/>
-            <a:r>
-              <a:rPr sz="1000" b="0">
-                <a:solidFill>
-                  <a:srgbClr val="1F1F1F"/>
-                </a:solidFill>
-                <a:latin typeface="Arial"/>
-              </a:rPr>
-              <a:t>braided sleeve</a:t>
-            </a:r>
-          </a:p>
-        </p:txBody>
-      </p:sp>
-      <p:sp>
-        <p:nvSpPr>
-          <p:cNvPr id="100" name="TextBox 99"/>
-          <p:cNvSpPr txBox="1"/>
-          <p:nvPr/>
-        </p:nvSpPr>
-        <p:spPr>
-          <a:xfrm>
-            <a:off x="3096000" y="1782000"/>
-            <a:ext cx="1080000" cy="270000"/>
-          </a:xfrm>
-          <a:prstGeom prst="rect">
-            <a:avLst/>
-          </a:prstGeom>
-          <a:noFill/>
-        </p:spPr>
-        <p:txBody>
-          <a:bodyPr wrap="square" lIns="10800" rIns="10800" tIns="3600" bIns="3600">
-            <a:spAutoFit/>
-          </a:bodyPr>
-          <a:lstStyle/>
-          <a:p>
-            <a:pPr algn="ctr"/>
-            <a:r>
-              <a:rPr sz="1000" b="0">
-                <a:solidFill>
-                  <a:srgbClr val="1F1F1F"/>
-                </a:solidFill>
-                <a:latin typeface="Arial"/>
-              </a:rPr>
-              <a:t>elastomer bladder</a:t>
-            </a:r>
-          </a:p>
-        </p:txBody>
-      </p:sp>
-      <p:sp>
-        <p:nvSpPr>
-          <p:cNvPr id="101" name="TextBox 100"/>
-          <p:cNvSpPr txBox="1"/>
-          <p:nvPr/>
-        </p:nvSpPr>
-        <p:spPr>
-          <a:xfrm>
-            <a:off x="4464000" y="2934000"/>
-            <a:ext cx="720000" cy="270000"/>
-          </a:xfrm>
-          <a:prstGeom prst="rect">
-            <a:avLst/>
-          </a:prstGeom>
-          <a:noFill/>
-        </p:spPr>
-        <p:txBody>
-          <a:bodyPr wrap="square" lIns="10800" rIns="10800" tIns="3600" bIns="3600">
-            <a:spAutoFit/>
-          </a:bodyPr>
-          <a:lstStyle/>
-          <a:p>
-            <a:pPr algn="ctr"/>
-            <a:r>
-              <a:rPr sz="1000" b="0">
-                <a:solidFill>
-                  <a:srgbClr val="1F1F1F"/>
-                </a:solidFill>
-                <a:latin typeface="Arial"/>
-              </a:rPr>
-              <a:t>end cap</a:t>
-            </a:r>
-          </a:p>
-        </p:txBody>
-      </p:sp>
-      <p:sp>
-        <p:nvSpPr>
-          <p:cNvPr id="102" name="TextBox 101"/>
-          <p:cNvSpPr txBox="1"/>
-          <p:nvPr/>
-        </p:nvSpPr>
-        <p:spPr>
-          <a:xfrm>
-            <a:off x="72000" y="3618000"/>
-            <a:ext cx="5580000" cy="270000"/>
-          </a:xfrm>
-          <a:prstGeom prst="rect">
-            <a:avLst/>
-          </a:prstGeom>
-          <a:noFill/>
-        </p:spPr>
-        <p:txBody>
-          <a:bodyPr wrap="square" lIns="10800" rIns="10800" tIns="3600" bIns="3600">
-            <a:spAutoFit/>
-          </a:bodyPr>
-          <a:lstStyle/>
-          <a:p>
-            <a:pPr algn="ctr"/>
-            <a:r>
-              <a:rPr sz="1000" b="0">
-                <a:solidFill>
-                  <a:srgbClr val="1F1F1F"/>
-                </a:solidFill>
-                <a:latin typeface="Arial"/>
-              </a:rPr>
-              <a:t>Assembly axis shown as the dash-dot centerline; components separate along it.</a:t>
+              <a:t>movable / loaded</a:t>
             </a:r>
           </a:p>
         </p:txBody>
